--- a/figure/ICPP.pptx
+++ b/figure/ICPP.pptx
@@ -215,7 +215,7 @@
           <a:p>
             <a:fld id="{DCE91CFC-8265-4471-8BD5-BB46E1DDD310}" type="datetimeFigureOut">
               <a:rPr lang="zh-CN" altLang="en-US" smtClean="0"/>
-              <a:t>2023/12/8</a:t>
+              <a:t>2023/12/9</a:t>
             </a:fld>
             <a:endParaRPr lang="zh-CN" altLang="en-US"/>
           </a:p>
@@ -1118,7 +1118,7 @@
           <a:p>
             <a:fld id="{4EEC62D4-A96C-41D8-B31A-4F9640C07160}" type="datetimeFigureOut">
               <a:rPr lang="zh-CN" altLang="en-US" smtClean="0"/>
-              <a:t>2023/12/8</a:t>
+              <a:t>2023/12/9</a:t>
             </a:fld>
             <a:endParaRPr lang="zh-CN" altLang="en-US"/>
           </a:p>
@@ -1288,7 +1288,7 @@
           <a:p>
             <a:fld id="{4EEC62D4-A96C-41D8-B31A-4F9640C07160}" type="datetimeFigureOut">
               <a:rPr lang="zh-CN" altLang="en-US" smtClean="0"/>
-              <a:t>2023/12/8</a:t>
+              <a:t>2023/12/9</a:t>
             </a:fld>
             <a:endParaRPr lang="zh-CN" altLang="en-US"/>
           </a:p>
@@ -1468,7 +1468,7 @@
           <a:p>
             <a:fld id="{4EEC62D4-A96C-41D8-B31A-4F9640C07160}" type="datetimeFigureOut">
               <a:rPr lang="zh-CN" altLang="en-US" smtClean="0"/>
-              <a:t>2023/12/8</a:t>
+              <a:t>2023/12/9</a:t>
             </a:fld>
             <a:endParaRPr lang="zh-CN" altLang="en-US"/>
           </a:p>
@@ -1638,7 +1638,7 @@
           <a:p>
             <a:fld id="{4EEC62D4-A96C-41D8-B31A-4F9640C07160}" type="datetimeFigureOut">
               <a:rPr lang="zh-CN" altLang="en-US" smtClean="0"/>
-              <a:t>2023/12/8</a:t>
+              <a:t>2023/12/9</a:t>
             </a:fld>
             <a:endParaRPr lang="zh-CN" altLang="en-US"/>
           </a:p>
@@ -1884,7 +1884,7 @@
           <a:p>
             <a:fld id="{4EEC62D4-A96C-41D8-B31A-4F9640C07160}" type="datetimeFigureOut">
               <a:rPr lang="zh-CN" altLang="en-US" smtClean="0"/>
-              <a:t>2023/12/8</a:t>
+              <a:t>2023/12/9</a:t>
             </a:fld>
             <a:endParaRPr lang="zh-CN" altLang="en-US"/>
           </a:p>
@@ -2116,7 +2116,7 @@
           <a:p>
             <a:fld id="{4EEC62D4-A96C-41D8-B31A-4F9640C07160}" type="datetimeFigureOut">
               <a:rPr lang="zh-CN" altLang="en-US" smtClean="0"/>
-              <a:t>2023/12/8</a:t>
+              <a:t>2023/12/9</a:t>
             </a:fld>
             <a:endParaRPr lang="zh-CN" altLang="en-US"/>
           </a:p>
@@ -2483,7 +2483,7 @@
           <a:p>
             <a:fld id="{4EEC62D4-A96C-41D8-B31A-4F9640C07160}" type="datetimeFigureOut">
               <a:rPr lang="zh-CN" altLang="en-US" smtClean="0"/>
-              <a:t>2023/12/8</a:t>
+              <a:t>2023/12/9</a:t>
             </a:fld>
             <a:endParaRPr lang="zh-CN" altLang="en-US"/>
           </a:p>
@@ -2601,7 +2601,7 @@
           <a:p>
             <a:fld id="{4EEC62D4-A96C-41D8-B31A-4F9640C07160}" type="datetimeFigureOut">
               <a:rPr lang="zh-CN" altLang="en-US" smtClean="0"/>
-              <a:t>2023/12/8</a:t>
+              <a:t>2023/12/9</a:t>
             </a:fld>
             <a:endParaRPr lang="zh-CN" altLang="en-US"/>
           </a:p>
@@ -2696,7 +2696,7 @@
           <a:p>
             <a:fld id="{4EEC62D4-A96C-41D8-B31A-4F9640C07160}" type="datetimeFigureOut">
               <a:rPr lang="zh-CN" altLang="en-US" smtClean="0"/>
-              <a:t>2023/12/8</a:t>
+              <a:t>2023/12/9</a:t>
             </a:fld>
             <a:endParaRPr lang="zh-CN" altLang="en-US"/>
           </a:p>
@@ -2973,7 +2973,7 @@
           <a:p>
             <a:fld id="{4EEC62D4-A96C-41D8-B31A-4F9640C07160}" type="datetimeFigureOut">
               <a:rPr lang="zh-CN" altLang="en-US" smtClean="0"/>
-              <a:t>2023/12/8</a:t>
+              <a:t>2023/12/9</a:t>
             </a:fld>
             <a:endParaRPr lang="zh-CN" altLang="en-US"/>
           </a:p>
@@ -3226,7 +3226,7 @@
           <a:p>
             <a:fld id="{4EEC62D4-A96C-41D8-B31A-4F9640C07160}" type="datetimeFigureOut">
               <a:rPr lang="zh-CN" altLang="en-US" smtClean="0"/>
-              <a:t>2023/12/8</a:t>
+              <a:t>2023/12/9</a:t>
             </a:fld>
             <a:endParaRPr lang="zh-CN" altLang="en-US"/>
           </a:p>
@@ -3439,7 +3439,7 @@
           <a:p>
             <a:fld id="{4EEC62D4-A96C-41D8-B31A-4F9640C07160}" type="datetimeFigureOut">
               <a:rPr lang="zh-CN" altLang="en-US" smtClean="0"/>
-              <a:t>2023/12/8</a:t>
+              <a:t>2023/12/9</a:t>
             </a:fld>
             <a:endParaRPr lang="zh-CN" altLang="en-US"/>
           </a:p>
@@ -12352,7 +12352,7 @@
           <a:graphicData uri="http://schemas.openxmlformats.org/presentationml/2006/ole">
             <mc:AlternateContent xmlns:mc="http://schemas.openxmlformats.org/markup-compatibility/2006">
               <mc:Choice xmlns:v="urn:schemas-microsoft-com:vml" Requires="v">
-                <p:oleObj spid="_x0000_s1056" name="AxMath" r:id="rId3" imgW="315000" imgH="228600" progId="Equation.AxMath">
+                <p:oleObj spid="_x0000_s1062" name="AxMath" r:id="rId3" imgW="315000" imgH="228600" progId="Equation.AxMath">
                   <p:embed/>
                 </p:oleObj>
               </mc:Choice>
@@ -12409,7 +12409,7 @@
           <a:graphicData uri="http://schemas.openxmlformats.org/presentationml/2006/ole">
             <mc:AlternateContent xmlns:mc="http://schemas.openxmlformats.org/markup-compatibility/2006">
               <mc:Choice xmlns:v="urn:schemas-microsoft-com:vml" Requires="v">
-                <p:oleObj spid="_x0000_s1057" name="AxMath" r:id="rId5" imgW="347760" imgH="228600" progId="Equation.AxMath">
+                <p:oleObj spid="_x0000_s1063" name="AxMath" r:id="rId5" imgW="347760" imgH="228600" progId="Equation.AxMath">
                   <p:embed/>
                 </p:oleObj>
               </mc:Choice>
@@ -12466,7 +12466,7 @@
           <a:graphicData uri="http://schemas.openxmlformats.org/presentationml/2006/ole">
             <mc:AlternateContent xmlns:mc="http://schemas.openxmlformats.org/markup-compatibility/2006">
               <mc:Choice xmlns:v="urn:schemas-microsoft-com:vml" Requires="v">
-                <p:oleObj spid="_x0000_s1058" name="AxMath" r:id="rId7" imgW="378000" imgH="228600" progId="Equation.AxMath">
+                <p:oleObj spid="_x0000_s1064" name="AxMath" r:id="rId7" imgW="378000" imgH="228600" progId="Equation.AxMath">
                   <p:embed/>
                 </p:oleObj>
               </mc:Choice>
@@ -13608,7 +13608,7 @@
           <a:graphicData uri="http://schemas.openxmlformats.org/presentationml/2006/ole">
             <mc:AlternateContent xmlns:mc="http://schemas.openxmlformats.org/markup-compatibility/2006">
               <mc:Choice xmlns:v="urn:schemas-microsoft-com:vml" Requires="v">
-                <p:oleObj spid="_x0000_s2206" name="AxMath" r:id="rId3" imgW="297360" imgH="151920" progId="Equation.AxMath">
+                <p:oleObj spid="_x0000_s2248" name="AxMath" r:id="rId3" imgW="297360" imgH="151920" progId="Equation.AxMath">
                   <p:embed/>
                 </p:oleObj>
               </mc:Choice>
@@ -14489,7 +14489,7 @@
           <a:graphicData uri="http://schemas.openxmlformats.org/presentationml/2006/ole">
             <mc:AlternateContent xmlns:mc="http://schemas.openxmlformats.org/markup-compatibility/2006">
               <mc:Choice xmlns:v="urn:schemas-microsoft-com:vml" Requires="v">
-                <p:oleObj spid="_x0000_s2207" name="AxMath" r:id="rId5" imgW="270360" imgH="151920" progId="Equation.AxMath">
+                <p:oleObj spid="_x0000_s2249" name="AxMath" r:id="rId5" imgW="270360" imgH="151920" progId="Equation.AxMath">
                   <p:embed/>
                 </p:oleObj>
               </mc:Choice>
@@ -14558,7 +14558,7 @@
           <a:graphicData uri="http://schemas.openxmlformats.org/presentationml/2006/ole">
             <mc:AlternateContent xmlns:mc="http://schemas.openxmlformats.org/markup-compatibility/2006">
               <mc:Choice xmlns:v="urn:schemas-microsoft-com:vml" Requires="v">
-                <p:oleObj spid="_x0000_s2208" name="AxMath" r:id="rId7" imgW="118080" imgH="151920" progId="Equation.AxMath">
+                <p:oleObj spid="_x0000_s2250" name="AxMath" r:id="rId7" imgW="118080" imgH="151920" progId="Equation.AxMath">
                   <p:embed/>
                 </p:oleObj>
               </mc:Choice>
@@ -14627,7 +14627,7 @@
           <a:graphicData uri="http://schemas.openxmlformats.org/presentationml/2006/ole">
             <mc:AlternateContent xmlns:mc="http://schemas.openxmlformats.org/markup-compatibility/2006">
               <mc:Choice xmlns:v="urn:schemas-microsoft-com:vml" Requires="v">
-                <p:oleObj spid="_x0000_s2209" name="AxMath" r:id="rId9" imgW="306360" imgH="151920" progId="Equation.AxMath">
+                <p:oleObj spid="_x0000_s2251" name="AxMath" r:id="rId9" imgW="306360" imgH="151920" progId="Equation.AxMath">
                   <p:embed/>
                 </p:oleObj>
               </mc:Choice>
@@ -14696,7 +14696,7 @@
           <a:graphicData uri="http://schemas.openxmlformats.org/presentationml/2006/ole">
             <mc:AlternateContent xmlns:mc="http://schemas.openxmlformats.org/markup-compatibility/2006">
               <mc:Choice xmlns:v="urn:schemas-microsoft-com:vml" Requires="v">
-                <p:oleObj spid="_x0000_s2210" name="AxMath" r:id="rId11" imgW="123120" imgH="151920" progId="Equation.AxMath">
+                <p:oleObj spid="_x0000_s2252" name="AxMath" r:id="rId11" imgW="123120" imgH="151920" progId="Equation.AxMath">
                   <p:embed/>
                 </p:oleObj>
               </mc:Choice>
@@ -14765,7 +14765,7 @@
           <a:graphicData uri="http://schemas.openxmlformats.org/presentationml/2006/ole">
             <mc:AlternateContent xmlns:mc="http://schemas.openxmlformats.org/markup-compatibility/2006">
               <mc:Choice xmlns:v="urn:schemas-microsoft-com:vml" Requires="v">
-                <p:oleObj spid="_x0000_s2211" name="AxMath" r:id="rId13" imgW="123840" imgH="151920" progId="Equation.AxMath">
+                <p:oleObj spid="_x0000_s2253" name="AxMath" r:id="rId13" imgW="123840" imgH="151920" progId="Equation.AxMath">
                   <p:embed/>
                 </p:oleObj>
               </mc:Choice>
@@ -14834,7 +14834,7 @@
           <a:graphicData uri="http://schemas.openxmlformats.org/presentationml/2006/ole">
             <mc:AlternateContent xmlns:mc="http://schemas.openxmlformats.org/markup-compatibility/2006">
               <mc:Choice xmlns:v="urn:schemas-microsoft-com:vml" Requires="v">
-                <p:oleObj spid="_x0000_s2212" name="AxMath" r:id="rId15" imgW="210240" imgH="151920" progId="Equation.AxMath">
+                <p:oleObj spid="_x0000_s2254" name="AxMath" r:id="rId15" imgW="210240" imgH="151920" progId="Equation.AxMath">
                   <p:embed/>
                 </p:oleObj>
               </mc:Choice>
@@ -14903,7 +14903,7 @@
           <a:graphicData uri="http://schemas.openxmlformats.org/presentationml/2006/ole">
             <mc:AlternateContent xmlns:mc="http://schemas.openxmlformats.org/markup-compatibility/2006">
               <mc:Choice xmlns:v="urn:schemas-microsoft-com:vml" Requires="v">
-                <p:oleObj spid="_x0000_s2213" name="AxMath" r:id="rId17" imgW="205560" imgH="151920" progId="Equation.AxMath">
+                <p:oleObj spid="_x0000_s2255" name="AxMath" r:id="rId17" imgW="205560" imgH="151920" progId="Equation.AxMath">
                   <p:embed/>
                 </p:oleObj>
               </mc:Choice>
@@ -14972,7 +14972,7 @@
           <a:graphicData uri="http://schemas.openxmlformats.org/presentationml/2006/ole">
             <mc:AlternateContent xmlns:mc="http://schemas.openxmlformats.org/markup-compatibility/2006">
               <mc:Choice xmlns:v="urn:schemas-microsoft-com:vml" Requires="v">
-                <p:oleObj spid="_x0000_s2214" name="AxMath" r:id="rId19" imgW="109440" imgH="151920" progId="Equation.AxMath">
+                <p:oleObj spid="_x0000_s2256" name="AxMath" r:id="rId19" imgW="109440" imgH="151920" progId="Equation.AxMath">
                   <p:embed/>
                 </p:oleObj>
               </mc:Choice>
@@ -15481,7 +15481,7 @@
           <a:graphicData uri="http://schemas.openxmlformats.org/presentationml/2006/ole">
             <mc:AlternateContent xmlns:mc="http://schemas.openxmlformats.org/markup-compatibility/2006">
               <mc:Choice xmlns:v="urn:schemas-microsoft-com:vml" Requires="v">
-                <p:oleObj spid="_x0000_s2215" name="AxMath" r:id="rId21" imgW="118080" imgH="151920" progId="Equation.AxMath">
+                <p:oleObj spid="_x0000_s2257" name="AxMath" r:id="rId21" imgW="118080" imgH="151920" progId="Equation.AxMath">
                   <p:embed/>
                 </p:oleObj>
               </mc:Choice>
@@ -15550,7 +15550,7 @@
           <a:graphicData uri="http://schemas.openxmlformats.org/presentationml/2006/ole">
             <mc:AlternateContent xmlns:mc="http://schemas.openxmlformats.org/markup-compatibility/2006">
               <mc:Choice xmlns:v="urn:schemas-microsoft-com:vml" Requires="v">
-                <p:oleObj spid="_x0000_s2216" name="AxMath" r:id="rId22" imgW="123120" imgH="151920" progId="Equation.AxMath">
+                <p:oleObj spid="_x0000_s2258" name="AxMath" r:id="rId22" imgW="123120" imgH="151920" progId="Equation.AxMath">
                   <p:embed/>
                 </p:oleObj>
               </mc:Choice>
@@ -15619,7 +15619,7 @@
           <a:graphicData uri="http://schemas.openxmlformats.org/presentationml/2006/ole">
             <mc:AlternateContent xmlns:mc="http://schemas.openxmlformats.org/markup-compatibility/2006">
               <mc:Choice xmlns:v="urn:schemas-microsoft-com:vml" Requires="v">
-                <p:oleObj spid="_x0000_s2217" name="AxMath" r:id="rId23" imgW="123840" imgH="151920" progId="Equation.AxMath">
+                <p:oleObj spid="_x0000_s2259" name="AxMath" r:id="rId23" imgW="123840" imgH="151920" progId="Equation.AxMath">
                   <p:embed/>
                 </p:oleObj>
               </mc:Choice>
@@ -15688,7 +15688,7 @@
           <a:graphicData uri="http://schemas.openxmlformats.org/presentationml/2006/ole">
             <mc:AlternateContent xmlns:mc="http://schemas.openxmlformats.org/markup-compatibility/2006">
               <mc:Choice xmlns:v="urn:schemas-microsoft-com:vml" Requires="v">
-                <p:oleObj spid="_x0000_s2218" name="AxMath" r:id="rId24" imgW="210240" imgH="151920" progId="Equation.AxMath">
+                <p:oleObj spid="_x0000_s2260" name="AxMath" r:id="rId24" imgW="210240" imgH="151920" progId="Equation.AxMath">
                   <p:embed/>
                 </p:oleObj>
               </mc:Choice>
@@ -15757,7 +15757,7 @@
           <a:graphicData uri="http://schemas.openxmlformats.org/presentationml/2006/ole">
             <mc:AlternateContent xmlns:mc="http://schemas.openxmlformats.org/markup-compatibility/2006">
               <mc:Choice xmlns:v="urn:schemas-microsoft-com:vml" Requires="v">
-                <p:oleObj spid="_x0000_s2219" name="AxMath" r:id="rId25" imgW="205560" imgH="151920" progId="Equation.AxMath">
+                <p:oleObj spid="_x0000_s2261" name="AxMath" r:id="rId25" imgW="205560" imgH="151920" progId="Equation.AxMath">
                   <p:embed/>
                 </p:oleObj>
               </mc:Choice>
@@ -15826,7 +15826,7 @@
           <a:graphicData uri="http://schemas.openxmlformats.org/presentationml/2006/ole">
             <mc:AlternateContent xmlns:mc="http://schemas.openxmlformats.org/markup-compatibility/2006">
               <mc:Choice xmlns:v="urn:schemas-microsoft-com:vml" Requires="v">
-                <p:oleObj spid="_x0000_s2220" name="AxMath" r:id="rId26" imgW="109440" imgH="151920" progId="Equation.AxMath">
+                <p:oleObj spid="_x0000_s2262" name="AxMath" r:id="rId26" imgW="109440" imgH="151920" progId="Equation.AxMath">
                   <p:embed/>
                 </p:oleObj>
               </mc:Choice>
@@ -15895,7 +15895,7 @@
           <a:graphicData uri="http://schemas.openxmlformats.org/presentationml/2006/ole">
             <mc:AlternateContent xmlns:mc="http://schemas.openxmlformats.org/markup-compatibility/2006">
               <mc:Choice xmlns:v="urn:schemas-microsoft-com:vml" Requires="v">
-                <p:oleObj spid="_x0000_s2221" name="AxMath" r:id="rId27" imgW="107640" imgH="151920" progId="Equation.AxMath">
+                <p:oleObj spid="_x0000_s2263" name="AxMath" r:id="rId27" imgW="107640" imgH="151920" progId="Equation.AxMath">
                   <p:embed/>
                 </p:oleObj>
               </mc:Choice>
@@ -15964,7 +15964,7 @@
           <a:graphicData uri="http://schemas.openxmlformats.org/presentationml/2006/ole">
             <mc:AlternateContent xmlns:mc="http://schemas.openxmlformats.org/markup-compatibility/2006">
               <mc:Choice xmlns:v="urn:schemas-microsoft-com:vml" Requires="v">
-                <p:oleObj spid="_x0000_s2222" name="AxMath" r:id="rId29" imgW="111960" imgH="151920" progId="Equation.AxMath">
+                <p:oleObj spid="_x0000_s2264" name="AxMath" r:id="rId29" imgW="111960" imgH="151920" progId="Equation.AxMath">
                   <p:embed/>
                 </p:oleObj>
               </mc:Choice>
@@ -16033,7 +16033,7 @@
           <a:graphicData uri="http://schemas.openxmlformats.org/presentationml/2006/ole">
             <mc:AlternateContent xmlns:mc="http://schemas.openxmlformats.org/markup-compatibility/2006">
               <mc:Choice xmlns:v="urn:schemas-microsoft-com:vml" Requires="v">
-                <p:oleObj spid="_x0000_s2223" name="AxMath" r:id="rId31" imgW="113040" imgH="151920" progId="Equation.AxMath">
+                <p:oleObj spid="_x0000_s2265" name="AxMath" r:id="rId31" imgW="113040" imgH="151920" progId="Equation.AxMath">
                   <p:embed/>
                 </p:oleObj>
               </mc:Choice>
@@ -16102,7 +16102,7 @@
           <a:graphicData uri="http://schemas.openxmlformats.org/presentationml/2006/ole">
             <mc:AlternateContent xmlns:mc="http://schemas.openxmlformats.org/markup-compatibility/2006">
               <mc:Choice xmlns:v="urn:schemas-microsoft-com:vml" Requires="v">
-                <p:oleObj spid="_x0000_s2224" name="AxMath" r:id="rId33" imgW="199440" imgH="151920" progId="Equation.AxMath">
+                <p:oleObj spid="_x0000_s2266" name="AxMath" r:id="rId33" imgW="199440" imgH="151920" progId="Equation.AxMath">
                   <p:embed/>
                 </p:oleObj>
               </mc:Choice>
@@ -16171,7 +16171,7 @@
           <a:graphicData uri="http://schemas.openxmlformats.org/presentationml/2006/ole">
             <mc:AlternateContent xmlns:mc="http://schemas.openxmlformats.org/markup-compatibility/2006">
               <mc:Choice xmlns:v="urn:schemas-microsoft-com:vml" Requires="v">
-                <p:oleObj spid="_x0000_s2225" name="AxMath" r:id="rId35" imgW="194760" imgH="151920" progId="Equation.AxMath">
+                <p:oleObj spid="_x0000_s2267" name="AxMath" r:id="rId35" imgW="194760" imgH="151920" progId="Equation.AxMath">
                   <p:embed/>
                 </p:oleObj>
               </mc:Choice>
@@ -16240,7 +16240,7 @@
           <a:graphicData uri="http://schemas.openxmlformats.org/presentationml/2006/ole">
             <mc:AlternateContent xmlns:mc="http://schemas.openxmlformats.org/markup-compatibility/2006">
               <mc:Choice xmlns:v="urn:schemas-microsoft-com:vml" Requires="v">
-                <p:oleObj spid="_x0000_s2226" name="AxMath" r:id="rId37" imgW="98280" imgH="151920" progId="Equation.AxMath">
+                <p:oleObj spid="_x0000_s2268" name="AxMath" r:id="rId37" imgW="98280" imgH="151920" progId="Equation.AxMath">
                   <p:embed/>
                 </p:oleObj>
               </mc:Choice>
@@ -23884,7 +23884,7 @@
           <a:graphicData uri="http://schemas.openxmlformats.org/presentationml/2006/ole">
             <mc:AlternateContent xmlns:mc="http://schemas.openxmlformats.org/markup-compatibility/2006">
               <mc:Choice xmlns:v="urn:schemas-microsoft-com:vml" Requires="v">
-                <p:oleObj spid="_x0000_s3158" name="AxMath" r:id="rId3" imgW="118080" imgH="151920" progId="Equation.AxMath">
+                <p:oleObj spid="_x0000_s3200" name="AxMath" r:id="rId3" imgW="118080" imgH="151920" progId="Equation.AxMath">
                   <p:embed/>
                 </p:oleObj>
               </mc:Choice>
@@ -23949,7 +23949,7 @@
           <a:graphicData uri="http://schemas.openxmlformats.org/presentationml/2006/ole">
             <mc:AlternateContent xmlns:mc="http://schemas.openxmlformats.org/markup-compatibility/2006">
               <mc:Choice xmlns:v="urn:schemas-microsoft-com:vml" Requires="v">
-                <p:oleObj spid="_x0000_s3159" name="AxMath" r:id="rId5" imgW="123120" imgH="151920" progId="Equation.AxMath">
+                <p:oleObj spid="_x0000_s3201" name="AxMath" r:id="rId5" imgW="123120" imgH="151920" progId="Equation.AxMath">
                   <p:embed/>
                 </p:oleObj>
               </mc:Choice>
@@ -24014,7 +24014,7 @@
           <a:graphicData uri="http://schemas.openxmlformats.org/presentationml/2006/ole">
             <mc:AlternateContent xmlns:mc="http://schemas.openxmlformats.org/markup-compatibility/2006">
               <mc:Choice xmlns:v="urn:schemas-microsoft-com:vml" Requires="v">
-                <p:oleObj spid="_x0000_s3160" name="AxMath" r:id="rId7" imgW="123840" imgH="151920" progId="Equation.AxMath">
+                <p:oleObj spid="_x0000_s3202" name="AxMath" r:id="rId7" imgW="123840" imgH="151920" progId="Equation.AxMath">
                   <p:embed/>
                 </p:oleObj>
               </mc:Choice>
@@ -24079,7 +24079,7 @@
           <a:graphicData uri="http://schemas.openxmlformats.org/presentationml/2006/ole">
             <mc:AlternateContent xmlns:mc="http://schemas.openxmlformats.org/markup-compatibility/2006">
               <mc:Choice xmlns:v="urn:schemas-microsoft-com:vml" Requires="v">
-                <p:oleObj spid="_x0000_s3161" name="AxMath" r:id="rId9" imgW="236160" imgH="151920" progId="Equation.AxMath">
+                <p:oleObj spid="_x0000_s3203" name="AxMath" r:id="rId9" imgW="236160" imgH="151920" progId="Equation.AxMath">
                   <p:embed/>
                 </p:oleObj>
               </mc:Choice>
@@ -24144,7 +24144,7 @@
           <a:graphicData uri="http://schemas.openxmlformats.org/presentationml/2006/ole">
             <mc:AlternateContent xmlns:mc="http://schemas.openxmlformats.org/markup-compatibility/2006">
               <mc:Choice xmlns:v="urn:schemas-microsoft-com:vml" Requires="v">
-                <p:oleObj spid="_x0000_s3162" name="AxMath" r:id="rId11" imgW="231840" imgH="151920" progId="Equation.AxMath">
+                <p:oleObj spid="_x0000_s3204" name="AxMath" r:id="rId11" imgW="231840" imgH="151920" progId="Equation.AxMath">
                   <p:embed/>
                 </p:oleObj>
               </mc:Choice>
@@ -24209,7 +24209,7 @@
           <a:graphicData uri="http://schemas.openxmlformats.org/presentationml/2006/ole">
             <mc:AlternateContent xmlns:mc="http://schemas.openxmlformats.org/markup-compatibility/2006">
               <mc:Choice xmlns:v="urn:schemas-microsoft-com:vml" Requires="v">
-                <p:oleObj spid="_x0000_s3163" name="AxMath" r:id="rId13" imgW="135360" imgH="151920" progId="Equation.AxMath">
+                <p:oleObj spid="_x0000_s3205" name="AxMath" r:id="rId13" imgW="135360" imgH="151920" progId="Equation.AxMath">
                   <p:embed/>
                 </p:oleObj>
               </mc:Choice>
@@ -24714,7 +24714,7 @@
           <a:graphicData uri="http://schemas.openxmlformats.org/presentationml/2006/ole">
             <mc:AlternateContent xmlns:mc="http://schemas.openxmlformats.org/markup-compatibility/2006">
               <mc:Choice xmlns:v="urn:schemas-microsoft-com:vml" Requires="v">
-                <p:oleObj spid="_x0000_s3164" name="AxMath" r:id="rId15" imgW="118080" imgH="151920" progId="Equation.AxMath">
+                <p:oleObj spid="_x0000_s3206" name="AxMath" r:id="rId15" imgW="118080" imgH="151920" progId="Equation.AxMath">
                   <p:embed/>
                 </p:oleObj>
               </mc:Choice>
@@ -24779,7 +24779,7 @@
           <a:graphicData uri="http://schemas.openxmlformats.org/presentationml/2006/ole">
             <mc:AlternateContent xmlns:mc="http://schemas.openxmlformats.org/markup-compatibility/2006">
               <mc:Choice xmlns:v="urn:schemas-microsoft-com:vml" Requires="v">
-                <p:oleObj spid="_x0000_s3165" name="AxMath" r:id="rId16" imgW="123120" imgH="151920" progId="Equation.AxMath">
+                <p:oleObj spid="_x0000_s3207" name="AxMath" r:id="rId16" imgW="123120" imgH="151920" progId="Equation.AxMath">
                   <p:embed/>
                 </p:oleObj>
               </mc:Choice>
@@ -24844,7 +24844,7 @@
           <a:graphicData uri="http://schemas.openxmlformats.org/presentationml/2006/ole">
             <mc:AlternateContent xmlns:mc="http://schemas.openxmlformats.org/markup-compatibility/2006">
               <mc:Choice xmlns:v="urn:schemas-microsoft-com:vml" Requires="v">
-                <p:oleObj spid="_x0000_s3166" name="AxMath" r:id="rId17" imgW="123840" imgH="151920" progId="Equation.AxMath">
+                <p:oleObj spid="_x0000_s3208" name="AxMath" r:id="rId17" imgW="123840" imgH="151920" progId="Equation.AxMath">
                   <p:embed/>
                 </p:oleObj>
               </mc:Choice>
@@ -24909,7 +24909,7 @@
           <a:graphicData uri="http://schemas.openxmlformats.org/presentationml/2006/ole">
             <mc:AlternateContent xmlns:mc="http://schemas.openxmlformats.org/markup-compatibility/2006">
               <mc:Choice xmlns:v="urn:schemas-microsoft-com:vml" Requires="v">
-                <p:oleObj spid="_x0000_s3167" name="AxMath" r:id="rId18" imgW="236160" imgH="151920" progId="Equation.AxMath">
+                <p:oleObj spid="_x0000_s3209" name="AxMath" r:id="rId18" imgW="236160" imgH="151920" progId="Equation.AxMath">
                   <p:embed/>
                 </p:oleObj>
               </mc:Choice>
@@ -24974,7 +24974,7 @@
           <a:graphicData uri="http://schemas.openxmlformats.org/presentationml/2006/ole">
             <mc:AlternateContent xmlns:mc="http://schemas.openxmlformats.org/markup-compatibility/2006">
               <mc:Choice xmlns:v="urn:schemas-microsoft-com:vml" Requires="v">
-                <p:oleObj spid="_x0000_s3168" name="AxMath" r:id="rId19" imgW="231840" imgH="151920" progId="Equation.AxMath">
+                <p:oleObj spid="_x0000_s3210" name="AxMath" r:id="rId19" imgW="231840" imgH="151920" progId="Equation.AxMath">
                   <p:embed/>
                 </p:oleObj>
               </mc:Choice>
@@ -25039,7 +25039,7 @@
           <a:graphicData uri="http://schemas.openxmlformats.org/presentationml/2006/ole">
             <mc:AlternateContent xmlns:mc="http://schemas.openxmlformats.org/markup-compatibility/2006">
               <mc:Choice xmlns:v="urn:schemas-microsoft-com:vml" Requires="v">
-                <p:oleObj spid="_x0000_s3169" name="AxMath" r:id="rId20" imgW="135360" imgH="151920" progId="Equation.AxMath">
+                <p:oleObj spid="_x0000_s3211" name="AxMath" r:id="rId20" imgW="135360" imgH="151920" progId="Equation.AxMath">
                   <p:embed/>
                 </p:oleObj>
               </mc:Choice>
@@ -25104,7 +25104,7 @@
           <a:graphicData uri="http://schemas.openxmlformats.org/presentationml/2006/ole">
             <mc:AlternateContent xmlns:mc="http://schemas.openxmlformats.org/markup-compatibility/2006">
               <mc:Choice xmlns:v="urn:schemas-microsoft-com:vml" Requires="v">
-                <p:oleObj spid="_x0000_s3170" name="AxMath" r:id="rId21" imgW="107640" imgH="151920" progId="Equation.AxMath">
+                <p:oleObj spid="_x0000_s3212" name="AxMath" r:id="rId21" imgW="107640" imgH="151920" progId="Equation.AxMath">
                   <p:embed/>
                 </p:oleObj>
               </mc:Choice>
@@ -25169,7 +25169,7 @@
           <a:graphicData uri="http://schemas.openxmlformats.org/presentationml/2006/ole">
             <mc:AlternateContent xmlns:mc="http://schemas.openxmlformats.org/markup-compatibility/2006">
               <mc:Choice xmlns:v="urn:schemas-microsoft-com:vml" Requires="v">
-                <p:oleObj spid="_x0000_s3171" name="AxMath" r:id="rId23" imgW="111960" imgH="151920" progId="Equation.AxMath">
+                <p:oleObj spid="_x0000_s3213" name="AxMath" r:id="rId23" imgW="111960" imgH="151920" progId="Equation.AxMath">
                   <p:embed/>
                 </p:oleObj>
               </mc:Choice>
@@ -25234,7 +25234,7 @@
           <a:graphicData uri="http://schemas.openxmlformats.org/presentationml/2006/ole">
             <mc:AlternateContent xmlns:mc="http://schemas.openxmlformats.org/markup-compatibility/2006">
               <mc:Choice xmlns:v="urn:schemas-microsoft-com:vml" Requires="v">
-                <p:oleObj spid="_x0000_s3172" name="AxMath" r:id="rId25" imgW="113040" imgH="151920" progId="Equation.AxMath">
+                <p:oleObj spid="_x0000_s3214" name="AxMath" r:id="rId25" imgW="113040" imgH="151920" progId="Equation.AxMath">
                   <p:embed/>
                 </p:oleObj>
               </mc:Choice>
@@ -25299,7 +25299,7 @@
           <a:graphicData uri="http://schemas.openxmlformats.org/presentationml/2006/ole">
             <mc:AlternateContent xmlns:mc="http://schemas.openxmlformats.org/markup-compatibility/2006">
               <mc:Choice xmlns:v="urn:schemas-microsoft-com:vml" Requires="v">
-                <p:oleObj spid="_x0000_s3173" name="AxMath" r:id="rId27" imgW="225720" imgH="151920" progId="Equation.AxMath">
+                <p:oleObj spid="_x0000_s3215" name="AxMath" r:id="rId27" imgW="225720" imgH="151920" progId="Equation.AxMath">
                   <p:embed/>
                 </p:oleObj>
               </mc:Choice>
@@ -25364,7 +25364,7 @@
           <a:graphicData uri="http://schemas.openxmlformats.org/presentationml/2006/ole">
             <mc:AlternateContent xmlns:mc="http://schemas.openxmlformats.org/markup-compatibility/2006">
               <mc:Choice xmlns:v="urn:schemas-microsoft-com:vml" Requires="v">
-                <p:oleObj spid="_x0000_s3174" name="AxMath" r:id="rId29" imgW="220680" imgH="151920" progId="Equation.AxMath">
+                <p:oleObj spid="_x0000_s3216" name="AxMath" r:id="rId29" imgW="220680" imgH="151920" progId="Equation.AxMath">
                   <p:embed/>
                 </p:oleObj>
               </mc:Choice>
@@ -25429,7 +25429,7 @@
           <a:graphicData uri="http://schemas.openxmlformats.org/presentationml/2006/ole">
             <mc:AlternateContent xmlns:mc="http://schemas.openxmlformats.org/markup-compatibility/2006">
               <mc:Choice xmlns:v="urn:schemas-microsoft-com:vml" Requires="v">
-                <p:oleObj spid="_x0000_s3175" name="AxMath" r:id="rId31" imgW="124920" imgH="151920" progId="Equation.AxMath">
+                <p:oleObj spid="_x0000_s3217" name="AxMath" r:id="rId31" imgW="124920" imgH="151920" progId="Equation.AxMath">
                   <p:embed/>
                 </p:oleObj>
               </mc:Choice>
@@ -25594,7 +25594,7 @@
           <a:graphicData uri="http://schemas.openxmlformats.org/presentationml/2006/ole">
             <mc:AlternateContent xmlns:mc="http://schemas.openxmlformats.org/markup-compatibility/2006">
               <mc:Choice xmlns:v="urn:schemas-microsoft-com:vml" Requires="v">
-                <p:oleObj spid="_x0000_s3176" name="AxMath" r:id="rId33" imgW="96840" imgH="226800" progId="Equation.AxMath">
+                <p:oleObj spid="_x0000_s3218" name="AxMath" r:id="rId33" imgW="96840" imgH="226800" progId="Equation.AxMath">
                   <p:embed/>
                 </p:oleObj>
               </mc:Choice>
@@ -25645,7 +25645,7 @@
           <a:graphicData uri="http://schemas.openxmlformats.org/presentationml/2006/ole">
             <mc:AlternateContent xmlns:mc="http://schemas.openxmlformats.org/markup-compatibility/2006">
               <mc:Choice xmlns:v="urn:schemas-microsoft-com:vml" Requires="v">
-                <p:oleObj spid="_x0000_s3177" name="AxMath" r:id="rId35" imgW="117360" imgH="226800" progId="Equation.AxMath">
+                <p:oleObj spid="_x0000_s3219" name="AxMath" r:id="rId35" imgW="117360" imgH="226800" progId="Equation.AxMath">
                   <p:embed/>
                 </p:oleObj>
               </mc:Choice>
@@ -25696,7 +25696,7 @@
           <a:graphicData uri="http://schemas.openxmlformats.org/presentationml/2006/ole">
             <mc:AlternateContent xmlns:mc="http://schemas.openxmlformats.org/markup-compatibility/2006">
               <mc:Choice xmlns:v="urn:schemas-microsoft-com:vml" Requires="v">
-                <p:oleObj spid="_x0000_s3178" name="AxMath" r:id="rId37" imgW="152280" imgH="226800" progId="Equation.AxMath">
+                <p:oleObj spid="_x0000_s3220" name="AxMath" r:id="rId37" imgW="152280" imgH="226800" progId="Equation.AxMath">
                   <p:embed/>
                 </p:oleObj>
               </mc:Choice>
@@ -50783,8 +50783,8 @@
         </p:nvSpPr>
         <p:spPr>
           <a:xfrm>
-            <a:off x="5649049" y="167610"/>
-            <a:ext cx="1117614" cy="400110"/>
+            <a:off x="5815042" y="167610"/>
+            <a:ext cx="604653" cy="400110"/>
           </a:xfrm>
           <a:prstGeom prst="rect">
             <a:avLst/>
@@ -50806,7 +50806,7 @@
           <a:p>
             <a:r>
               <a:rPr lang="en-US" altLang="zh-CN" sz="2000" b="1" dirty="0" smtClean="0"/>
-              <a:t>QPI/UPI</a:t>
+              <a:t>QPI</a:t>
             </a:r>
             <a:endParaRPr lang="zh-CN" altLang="en-US" sz="2000" b="1" dirty="0"/>
           </a:p>
@@ -52443,7 +52443,7 @@
           <a:p>
             <a:pPr algn="ctr"/>
             <a:r>
-              <a:rPr lang="en-US" altLang="zh-CN" sz="2000" b="1" dirty="0"/>
+              <a:rPr lang="en-US" altLang="zh-CN" sz="2000" b="1" dirty="0" smtClean="0"/>
               <a:t>Memory</a:t>
             </a:r>
             <a:endParaRPr lang="zh-CN" altLang="en-US" sz="2000" b="1" dirty="0"/>

--- a/figure/ICPP.pptx
+++ b/figure/ICPP.pptx
@@ -215,7 +215,7 @@
           <a:p>
             <a:fld id="{DCE91CFC-8265-4471-8BD5-BB46E1DDD310}" type="datetimeFigureOut">
               <a:rPr lang="zh-CN" altLang="en-US" smtClean="0"/>
-              <a:t>2023/12/9</a:t>
+              <a:t>2023/12/10</a:t>
             </a:fld>
             <a:endParaRPr lang="zh-CN" altLang="en-US"/>
           </a:p>
@@ -1118,7 +1118,7 @@
           <a:p>
             <a:fld id="{4EEC62D4-A96C-41D8-B31A-4F9640C07160}" type="datetimeFigureOut">
               <a:rPr lang="zh-CN" altLang="en-US" smtClean="0"/>
-              <a:t>2023/12/9</a:t>
+              <a:t>2023/12/10</a:t>
             </a:fld>
             <a:endParaRPr lang="zh-CN" altLang="en-US"/>
           </a:p>
@@ -1288,7 +1288,7 @@
           <a:p>
             <a:fld id="{4EEC62D4-A96C-41D8-B31A-4F9640C07160}" type="datetimeFigureOut">
               <a:rPr lang="zh-CN" altLang="en-US" smtClean="0"/>
-              <a:t>2023/12/9</a:t>
+              <a:t>2023/12/10</a:t>
             </a:fld>
             <a:endParaRPr lang="zh-CN" altLang="en-US"/>
           </a:p>
@@ -1468,7 +1468,7 @@
           <a:p>
             <a:fld id="{4EEC62D4-A96C-41D8-B31A-4F9640C07160}" type="datetimeFigureOut">
               <a:rPr lang="zh-CN" altLang="en-US" smtClean="0"/>
-              <a:t>2023/12/9</a:t>
+              <a:t>2023/12/10</a:t>
             </a:fld>
             <a:endParaRPr lang="zh-CN" altLang="en-US"/>
           </a:p>
@@ -1638,7 +1638,7 @@
           <a:p>
             <a:fld id="{4EEC62D4-A96C-41D8-B31A-4F9640C07160}" type="datetimeFigureOut">
               <a:rPr lang="zh-CN" altLang="en-US" smtClean="0"/>
-              <a:t>2023/12/9</a:t>
+              <a:t>2023/12/10</a:t>
             </a:fld>
             <a:endParaRPr lang="zh-CN" altLang="en-US"/>
           </a:p>
@@ -1884,7 +1884,7 @@
           <a:p>
             <a:fld id="{4EEC62D4-A96C-41D8-B31A-4F9640C07160}" type="datetimeFigureOut">
               <a:rPr lang="zh-CN" altLang="en-US" smtClean="0"/>
-              <a:t>2023/12/9</a:t>
+              <a:t>2023/12/10</a:t>
             </a:fld>
             <a:endParaRPr lang="zh-CN" altLang="en-US"/>
           </a:p>
@@ -2116,7 +2116,7 @@
           <a:p>
             <a:fld id="{4EEC62D4-A96C-41D8-B31A-4F9640C07160}" type="datetimeFigureOut">
               <a:rPr lang="zh-CN" altLang="en-US" smtClean="0"/>
-              <a:t>2023/12/9</a:t>
+              <a:t>2023/12/10</a:t>
             </a:fld>
             <a:endParaRPr lang="zh-CN" altLang="en-US"/>
           </a:p>
@@ -2483,7 +2483,7 @@
           <a:p>
             <a:fld id="{4EEC62D4-A96C-41D8-B31A-4F9640C07160}" type="datetimeFigureOut">
               <a:rPr lang="zh-CN" altLang="en-US" smtClean="0"/>
-              <a:t>2023/12/9</a:t>
+              <a:t>2023/12/10</a:t>
             </a:fld>
             <a:endParaRPr lang="zh-CN" altLang="en-US"/>
           </a:p>
@@ -2601,7 +2601,7 @@
           <a:p>
             <a:fld id="{4EEC62D4-A96C-41D8-B31A-4F9640C07160}" type="datetimeFigureOut">
               <a:rPr lang="zh-CN" altLang="en-US" smtClean="0"/>
-              <a:t>2023/12/9</a:t>
+              <a:t>2023/12/10</a:t>
             </a:fld>
             <a:endParaRPr lang="zh-CN" altLang="en-US"/>
           </a:p>
@@ -2696,7 +2696,7 @@
           <a:p>
             <a:fld id="{4EEC62D4-A96C-41D8-B31A-4F9640C07160}" type="datetimeFigureOut">
               <a:rPr lang="zh-CN" altLang="en-US" smtClean="0"/>
-              <a:t>2023/12/9</a:t>
+              <a:t>2023/12/10</a:t>
             </a:fld>
             <a:endParaRPr lang="zh-CN" altLang="en-US"/>
           </a:p>
@@ -2973,7 +2973,7 @@
           <a:p>
             <a:fld id="{4EEC62D4-A96C-41D8-B31A-4F9640C07160}" type="datetimeFigureOut">
               <a:rPr lang="zh-CN" altLang="en-US" smtClean="0"/>
-              <a:t>2023/12/9</a:t>
+              <a:t>2023/12/10</a:t>
             </a:fld>
             <a:endParaRPr lang="zh-CN" altLang="en-US"/>
           </a:p>
@@ -3226,7 +3226,7 @@
           <a:p>
             <a:fld id="{4EEC62D4-A96C-41D8-B31A-4F9640C07160}" type="datetimeFigureOut">
               <a:rPr lang="zh-CN" altLang="en-US" smtClean="0"/>
-              <a:t>2023/12/9</a:t>
+              <a:t>2023/12/10</a:t>
             </a:fld>
             <a:endParaRPr lang="zh-CN" altLang="en-US"/>
           </a:p>
@@ -3439,7 +3439,7 @@
           <a:p>
             <a:fld id="{4EEC62D4-A96C-41D8-B31A-4F9640C07160}" type="datetimeFigureOut">
               <a:rPr lang="zh-CN" altLang="en-US" smtClean="0"/>
-              <a:t>2023/12/9</a:t>
+              <a:t>2023/12/10</a:t>
             </a:fld>
             <a:endParaRPr lang="zh-CN" altLang="en-US"/>
           </a:p>
@@ -12352,7 +12352,7 @@
           <a:graphicData uri="http://schemas.openxmlformats.org/presentationml/2006/ole">
             <mc:AlternateContent xmlns:mc="http://schemas.openxmlformats.org/markup-compatibility/2006">
               <mc:Choice xmlns:v="urn:schemas-microsoft-com:vml" Requires="v">
-                <p:oleObj spid="_x0000_s1062" name="AxMath" r:id="rId3" imgW="315000" imgH="228600" progId="Equation.AxMath">
+                <p:oleObj spid="_x0000_s1068" name="AxMath" r:id="rId3" imgW="315000" imgH="228600" progId="Equation.AxMath">
                   <p:embed/>
                 </p:oleObj>
               </mc:Choice>
@@ -12409,7 +12409,7 @@
           <a:graphicData uri="http://schemas.openxmlformats.org/presentationml/2006/ole">
             <mc:AlternateContent xmlns:mc="http://schemas.openxmlformats.org/markup-compatibility/2006">
               <mc:Choice xmlns:v="urn:schemas-microsoft-com:vml" Requires="v">
-                <p:oleObj spid="_x0000_s1063" name="AxMath" r:id="rId5" imgW="347760" imgH="228600" progId="Equation.AxMath">
+                <p:oleObj spid="_x0000_s1069" name="AxMath" r:id="rId5" imgW="347760" imgH="228600" progId="Equation.AxMath">
                   <p:embed/>
                 </p:oleObj>
               </mc:Choice>
@@ -12466,7 +12466,7 @@
           <a:graphicData uri="http://schemas.openxmlformats.org/presentationml/2006/ole">
             <mc:AlternateContent xmlns:mc="http://schemas.openxmlformats.org/markup-compatibility/2006">
               <mc:Choice xmlns:v="urn:schemas-microsoft-com:vml" Requires="v">
-                <p:oleObj spid="_x0000_s1064" name="AxMath" r:id="rId7" imgW="378000" imgH="228600" progId="Equation.AxMath">
+                <p:oleObj spid="_x0000_s1070" name="AxMath" r:id="rId7" imgW="378000" imgH="228600" progId="Equation.AxMath">
                   <p:embed/>
                 </p:oleObj>
               </mc:Choice>
@@ -13608,7 +13608,7 @@
           <a:graphicData uri="http://schemas.openxmlformats.org/presentationml/2006/ole">
             <mc:AlternateContent xmlns:mc="http://schemas.openxmlformats.org/markup-compatibility/2006">
               <mc:Choice xmlns:v="urn:schemas-microsoft-com:vml" Requires="v">
-                <p:oleObj spid="_x0000_s2248" name="AxMath" r:id="rId3" imgW="297360" imgH="151920" progId="Equation.AxMath">
+                <p:oleObj spid="_x0000_s2290" name="AxMath" r:id="rId3" imgW="297360" imgH="151920" progId="Equation.AxMath">
                   <p:embed/>
                 </p:oleObj>
               </mc:Choice>
@@ -14489,7 +14489,7 @@
           <a:graphicData uri="http://schemas.openxmlformats.org/presentationml/2006/ole">
             <mc:AlternateContent xmlns:mc="http://schemas.openxmlformats.org/markup-compatibility/2006">
               <mc:Choice xmlns:v="urn:schemas-microsoft-com:vml" Requires="v">
-                <p:oleObj spid="_x0000_s2249" name="AxMath" r:id="rId5" imgW="270360" imgH="151920" progId="Equation.AxMath">
+                <p:oleObj spid="_x0000_s2291" name="AxMath" r:id="rId5" imgW="270360" imgH="151920" progId="Equation.AxMath">
                   <p:embed/>
                 </p:oleObj>
               </mc:Choice>
@@ -14558,7 +14558,7 @@
           <a:graphicData uri="http://schemas.openxmlformats.org/presentationml/2006/ole">
             <mc:AlternateContent xmlns:mc="http://schemas.openxmlformats.org/markup-compatibility/2006">
               <mc:Choice xmlns:v="urn:schemas-microsoft-com:vml" Requires="v">
-                <p:oleObj spid="_x0000_s2250" name="AxMath" r:id="rId7" imgW="118080" imgH="151920" progId="Equation.AxMath">
+                <p:oleObj spid="_x0000_s2292" name="AxMath" r:id="rId7" imgW="118080" imgH="151920" progId="Equation.AxMath">
                   <p:embed/>
                 </p:oleObj>
               </mc:Choice>
@@ -14627,7 +14627,7 @@
           <a:graphicData uri="http://schemas.openxmlformats.org/presentationml/2006/ole">
             <mc:AlternateContent xmlns:mc="http://schemas.openxmlformats.org/markup-compatibility/2006">
               <mc:Choice xmlns:v="urn:schemas-microsoft-com:vml" Requires="v">
-                <p:oleObj spid="_x0000_s2251" name="AxMath" r:id="rId9" imgW="306360" imgH="151920" progId="Equation.AxMath">
+                <p:oleObj spid="_x0000_s2293" name="AxMath" r:id="rId9" imgW="306360" imgH="151920" progId="Equation.AxMath">
                   <p:embed/>
                 </p:oleObj>
               </mc:Choice>
@@ -14696,7 +14696,7 @@
           <a:graphicData uri="http://schemas.openxmlformats.org/presentationml/2006/ole">
             <mc:AlternateContent xmlns:mc="http://schemas.openxmlformats.org/markup-compatibility/2006">
               <mc:Choice xmlns:v="urn:schemas-microsoft-com:vml" Requires="v">
-                <p:oleObj spid="_x0000_s2252" name="AxMath" r:id="rId11" imgW="123120" imgH="151920" progId="Equation.AxMath">
+                <p:oleObj spid="_x0000_s2294" name="AxMath" r:id="rId11" imgW="123120" imgH="151920" progId="Equation.AxMath">
                   <p:embed/>
                 </p:oleObj>
               </mc:Choice>
@@ -14765,7 +14765,7 @@
           <a:graphicData uri="http://schemas.openxmlformats.org/presentationml/2006/ole">
             <mc:AlternateContent xmlns:mc="http://schemas.openxmlformats.org/markup-compatibility/2006">
               <mc:Choice xmlns:v="urn:schemas-microsoft-com:vml" Requires="v">
-                <p:oleObj spid="_x0000_s2253" name="AxMath" r:id="rId13" imgW="123840" imgH="151920" progId="Equation.AxMath">
+                <p:oleObj spid="_x0000_s2295" name="AxMath" r:id="rId13" imgW="123840" imgH="151920" progId="Equation.AxMath">
                   <p:embed/>
                 </p:oleObj>
               </mc:Choice>
@@ -14834,7 +14834,7 @@
           <a:graphicData uri="http://schemas.openxmlformats.org/presentationml/2006/ole">
             <mc:AlternateContent xmlns:mc="http://schemas.openxmlformats.org/markup-compatibility/2006">
               <mc:Choice xmlns:v="urn:schemas-microsoft-com:vml" Requires="v">
-                <p:oleObj spid="_x0000_s2254" name="AxMath" r:id="rId15" imgW="210240" imgH="151920" progId="Equation.AxMath">
+                <p:oleObj spid="_x0000_s2296" name="AxMath" r:id="rId15" imgW="210240" imgH="151920" progId="Equation.AxMath">
                   <p:embed/>
                 </p:oleObj>
               </mc:Choice>
@@ -14903,7 +14903,7 @@
           <a:graphicData uri="http://schemas.openxmlformats.org/presentationml/2006/ole">
             <mc:AlternateContent xmlns:mc="http://schemas.openxmlformats.org/markup-compatibility/2006">
               <mc:Choice xmlns:v="urn:schemas-microsoft-com:vml" Requires="v">
-                <p:oleObj spid="_x0000_s2255" name="AxMath" r:id="rId17" imgW="205560" imgH="151920" progId="Equation.AxMath">
+                <p:oleObj spid="_x0000_s2297" name="AxMath" r:id="rId17" imgW="205560" imgH="151920" progId="Equation.AxMath">
                   <p:embed/>
                 </p:oleObj>
               </mc:Choice>
@@ -14972,7 +14972,7 @@
           <a:graphicData uri="http://schemas.openxmlformats.org/presentationml/2006/ole">
             <mc:AlternateContent xmlns:mc="http://schemas.openxmlformats.org/markup-compatibility/2006">
               <mc:Choice xmlns:v="urn:schemas-microsoft-com:vml" Requires="v">
-                <p:oleObj spid="_x0000_s2256" name="AxMath" r:id="rId19" imgW="109440" imgH="151920" progId="Equation.AxMath">
+                <p:oleObj spid="_x0000_s2298" name="AxMath" r:id="rId19" imgW="109440" imgH="151920" progId="Equation.AxMath">
                   <p:embed/>
                 </p:oleObj>
               </mc:Choice>
@@ -15481,7 +15481,7 @@
           <a:graphicData uri="http://schemas.openxmlformats.org/presentationml/2006/ole">
             <mc:AlternateContent xmlns:mc="http://schemas.openxmlformats.org/markup-compatibility/2006">
               <mc:Choice xmlns:v="urn:schemas-microsoft-com:vml" Requires="v">
-                <p:oleObj spid="_x0000_s2257" name="AxMath" r:id="rId21" imgW="118080" imgH="151920" progId="Equation.AxMath">
+                <p:oleObj spid="_x0000_s2299" name="AxMath" r:id="rId21" imgW="118080" imgH="151920" progId="Equation.AxMath">
                   <p:embed/>
                 </p:oleObj>
               </mc:Choice>
@@ -15550,7 +15550,7 @@
           <a:graphicData uri="http://schemas.openxmlformats.org/presentationml/2006/ole">
             <mc:AlternateContent xmlns:mc="http://schemas.openxmlformats.org/markup-compatibility/2006">
               <mc:Choice xmlns:v="urn:schemas-microsoft-com:vml" Requires="v">
-                <p:oleObj spid="_x0000_s2258" name="AxMath" r:id="rId22" imgW="123120" imgH="151920" progId="Equation.AxMath">
+                <p:oleObj spid="_x0000_s2300" name="AxMath" r:id="rId22" imgW="123120" imgH="151920" progId="Equation.AxMath">
                   <p:embed/>
                 </p:oleObj>
               </mc:Choice>
@@ -15619,7 +15619,7 @@
           <a:graphicData uri="http://schemas.openxmlformats.org/presentationml/2006/ole">
             <mc:AlternateContent xmlns:mc="http://schemas.openxmlformats.org/markup-compatibility/2006">
               <mc:Choice xmlns:v="urn:schemas-microsoft-com:vml" Requires="v">
-                <p:oleObj spid="_x0000_s2259" name="AxMath" r:id="rId23" imgW="123840" imgH="151920" progId="Equation.AxMath">
+                <p:oleObj spid="_x0000_s2301" name="AxMath" r:id="rId23" imgW="123840" imgH="151920" progId="Equation.AxMath">
                   <p:embed/>
                 </p:oleObj>
               </mc:Choice>
@@ -15688,7 +15688,7 @@
           <a:graphicData uri="http://schemas.openxmlformats.org/presentationml/2006/ole">
             <mc:AlternateContent xmlns:mc="http://schemas.openxmlformats.org/markup-compatibility/2006">
               <mc:Choice xmlns:v="urn:schemas-microsoft-com:vml" Requires="v">
-                <p:oleObj spid="_x0000_s2260" name="AxMath" r:id="rId24" imgW="210240" imgH="151920" progId="Equation.AxMath">
+                <p:oleObj spid="_x0000_s2302" name="AxMath" r:id="rId24" imgW="210240" imgH="151920" progId="Equation.AxMath">
                   <p:embed/>
                 </p:oleObj>
               </mc:Choice>
@@ -15757,7 +15757,7 @@
           <a:graphicData uri="http://schemas.openxmlformats.org/presentationml/2006/ole">
             <mc:AlternateContent xmlns:mc="http://schemas.openxmlformats.org/markup-compatibility/2006">
               <mc:Choice xmlns:v="urn:schemas-microsoft-com:vml" Requires="v">
-                <p:oleObj spid="_x0000_s2261" name="AxMath" r:id="rId25" imgW="205560" imgH="151920" progId="Equation.AxMath">
+                <p:oleObj spid="_x0000_s2303" name="AxMath" r:id="rId25" imgW="205560" imgH="151920" progId="Equation.AxMath">
                   <p:embed/>
                 </p:oleObj>
               </mc:Choice>
@@ -15826,7 +15826,7 @@
           <a:graphicData uri="http://schemas.openxmlformats.org/presentationml/2006/ole">
             <mc:AlternateContent xmlns:mc="http://schemas.openxmlformats.org/markup-compatibility/2006">
               <mc:Choice xmlns:v="urn:schemas-microsoft-com:vml" Requires="v">
-                <p:oleObj spid="_x0000_s2262" name="AxMath" r:id="rId26" imgW="109440" imgH="151920" progId="Equation.AxMath">
+                <p:oleObj spid="_x0000_s2304" name="AxMath" r:id="rId26" imgW="109440" imgH="151920" progId="Equation.AxMath">
                   <p:embed/>
                 </p:oleObj>
               </mc:Choice>
@@ -15895,7 +15895,7 @@
           <a:graphicData uri="http://schemas.openxmlformats.org/presentationml/2006/ole">
             <mc:AlternateContent xmlns:mc="http://schemas.openxmlformats.org/markup-compatibility/2006">
               <mc:Choice xmlns:v="urn:schemas-microsoft-com:vml" Requires="v">
-                <p:oleObj spid="_x0000_s2263" name="AxMath" r:id="rId27" imgW="107640" imgH="151920" progId="Equation.AxMath">
+                <p:oleObj spid="_x0000_s2305" name="AxMath" r:id="rId27" imgW="107640" imgH="151920" progId="Equation.AxMath">
                   <p:embed/>
                 </p:oleObj>
               </mc:Choice>
@@ -15964,7 +15964,7 @@
           <a:graphicData uri="http://schemas.openxmlformats.org/presentationml/2006/ole">
             <mc:AlternateContent xmlns:mc="http://schemas.openxmlformats.org/markup-compatibility/2006">
               <mc:Choice xmlns:v="urn:schemas-microsoft-com:vml" Requires="v">
-                <p:oleObj spid="_x0000_s2264" name="AxMath" r:id="rId29" imgW="111960" imgH="151920" progId="Equation.AxMath">
+                <p:oleObj spid="_x0000_s2306" name="AxMath" r:id="rId29" imgW="111960" imgH="151920" progId="Equation.AxMath">
                   <p:embed/>
                 </p:oleObj>
               </mc:Choice>
@@ -16033,7 +16033,7 @@
           <a:graphicData uri="http://schemas.openxmlformats.org/presentationml/2006/ole">
             <mc:AlternateContent xmlns:mc="http://schemas.openxmlformats.org/markup-compatibility/2006">
               <mc:Choice xmlns:v="urn:schemas-microsoft-com:vml" Requires="v">
-                <p:oleObj spid="_x0000_s2265" name="AxMath" r:id="rId31" imgW="113040" imgH="151920" progId="Equation.AxMath">
+                <p:oleObj spid="_x0000_s2307" name="AxMath" r:id="rId31" imgW="113040" imgH="151920" progId="Equation.AxMath">
                   <p:embed/>
                 </p:oleObj>
               </mc:Choice>
@@ -16102,7 +16102,7 @@
           <a:graphicData uri="http://schemas.openxmlformats.org/presentationml/2006/ole">
             <mc:AlternateContent xmlns:mc="http://schemas.openxmlformats.org/markup-compatibility/2006">
               <mc:Choice xmlns:v="urn:schemas-microsoft-com:vml" Requires="v">
-                <p:oleObj spid="_x0000_s2266" name="AxMath" r:id="rId33" imgW="199440" imgH="151920" progId="Equation.AxMath">
+                <p:oleObj spid="_x0000_s2308" name="AxMath" r:id="rId33" imgW="199440" imgH="151920" progId="Equation.AxMath">
                   <p:embed/>
                 </p:oleObj>
               </mc:Choice>
@@ -16171,7 +16171,7 @@
           <a:graphicData uri="http://schemas.openxmlformats.org/presentationml/2006/ole">
             <mc:AlternateContent xmlns:mc="http://schemas.openxmlformats.org/markup-compatibility/2006">
               <mc:Choice xmlns:v="urn:schemas-microsoft-com:vml" Requires="v">
-                <p:oleObj spid="_x0000_s2267" name="AxMath" r:id="rId35" imgW="194760" imgH="151920" progId="Equation.AxMath">
+                <p:oleObj spid="_x0000_s2309" name="AxMath" r:id="rId35" imgW="194760" imgH="151920" progId="Equation.AxMath">
                   <p:embed/>
                 </p:oleObj>
               </mc:Choice>
@@ -16240,7 +16240,7 @@
           <a:graphicData uri="http://schemas.openxmlformats.org/presentationml/2006/ole">
             <mc:AlternateContent xmlns:mc="http://schemas.openxmlformats.org/markup-compatibility/2006">
               <mc:Choice xmlns:v="urn:schemas-microsoft-com:vml" Requires="v">
-                <p:oleObj spid="_x0000_s2268" name="AxMath" r:id="rId37" imgW="98280" imgH="151920" progId="Equation.AxMath">
+                <p:oleObj spid="_x0000_s2310" name="AxMath" r:id="rId37" imgW="98280" imgH="151920" progId="Equation.AxMath">
                   <p:embed/>
                 </p:oleObj>
               </mc:Choice>
@@ -23884,7 +23884,7 @@
           <a:graphicData uri="http://schemas.openxmlformats.org/presentationml/2006/ole">
             <mc:AlternateContent xmlns:mc="http://schemas.openxmlformats.org/markup-compatibility/2006">
               <mc:Choice xmlns:v="urn:schemas-microsoft-com:vml" Requires="v">
-                <p:oleObj spid="_x0000_s3200" name="AxMath" r:id="rId3" imgW="118080" imgH="151920" progId="Equation.AxMath">
+                <p:oleObj spid="_x0000_s3242" name="AxMath" r:id="rId3" imgW="118080" imgH="151920" progId="Equation.AxMath">
                   <p:embed/>
                 </p:oleObj>
               </mc:Choice>
@@ -23949,7 +23949,7 @@
           <a:graphicData uri="http://schemas.openxmlformats.org/presentationml/2006/ole">
             <mc:AlternateContent xmlns:mc="http://schemas.openxmlformats.org/markup-compatibility/2006">
               <mc:Choice xmlns:v="urn:schemas-microsoft-com:vml" Requires="v">
-                <p:oleObj spid="_x0000_s3201" name="AxMath" r:id="rId5" imgW="123120" imgH="151920" progId="Equation.AxMath">
+                <p:oleObj spid="_x0000_s3243" name="AxMath" r:id="rId5" imgW="123120" imgH="151920" progId="Equation.AxMath">
                   <p:embed/>
                 </p:oleObj>
               </mc:Choice>
@@ -24014,7 +24014,7 @@
           <a:graphicData uri="http://schemas.openxmlformats.org/presentationml/2006/ole">
             <mc:AlternateContent xmlns:mc="http://schemas.openxmlformats.org/markup-compatibility/2006">
               <mc:Choice xmlns:v="urn:schemas-microsoft-com:vml" Requires="v">
-                <p:oleObj spid="_x0000_s3202" name="AxMath" r:id="rId7" imgW="123840" imgH="151920" progId="Equation.AxMath">
+                <p:oleObj spid="_x0000_s3244" name="AxMath" r:id="rId7" imgW="123840" imgH="151920" progId="Equation.AxMath">
                   <p:embed/>
                 </p:oleObj>
               </mc:Choice>
@@ -24079,7 +24079,7 @@
           <a:graphicData uri="http://schemas.openxmlformats.org/presentationml/2006/ole">
             <mc:AlternateContent xmlns:mc="http://schemas.openxmlformats.org/markup-compatibility/2006">
               <mc:Choice xmlns:v="urn:schemas-microsoft-com:vml" Requires="v">
-                <p:oleObj spid="_x0000_s3203" name="AxMath" r:id="rId9" imgW="236160" imgH="151920" progId="Equation.AxMath">
+                <p:oleObj spid="_x0000_s3245" name="AxMath" r:id="rId9" imgW="236160" imgH="151920" progId="Equation.AxMath">
                   <p:embed/>
                 </p:oleObj>
               </mc:Choice>
@@ -24144,7 +24144,7 @@
           <a:graphicData uri="http://schemas.openxmlformats.org/presentationml/2006/ole">
             <mc:AlternateContent xmlns:mc="http://schemas.openxmlformats.org/markup-compatibility/2006">
               <mc:Choice xmlns:v="urn:schemas-microsoft-com:vml" Requires="v">
-                <p:oleObj spid="_x0000_s3204" name="AxMath" r:id="rId11" imgW="231840" imgH="151920" progId="Equation.AxMath">
+                <p:oleObj spid="_x0000_s3246" name="AxMath" r:id="rId11" imgW="231840" imgH="151920" progId="Equation.AxMath">
                   <p:embed/>
                 </p:oleObj>
               </mc:Choice>
@@ -24209,7 +24209,7 @@
           <a:graphicData uri="http://schemas.openxmlformats.org/presentationml/2006/ole">
             <mc:AlternateContent xmlns:mc="http://schemas.openxmlformats.org/markup-compatibility/2006">
               <mc:Choice xmlns:v="urn:schemas-microsoft-com:vml" Requires="v">
-                <p:oleObj spid="_x0000_s3205" name="AxMath" r:id="rId13" imgW="135360" imgH="151920" progId="Equation.AxMath">
+                <p:oleObj spid="_x0000_s3247" name="AxMath" r:id="rId13" imgW="135360" imgH="151920" progId="Equation.AxMath">
                   <p:embed/>
                 </p:oleObj>
               </mc:Choice>
@@ -24714,7 +24714,7 @@
           <a:graphicData uri="http://schemas.openxmlformats.org/presentationml/2006/ole">
             <mc:AlternateContent xmlns:mc="http://schemas.openxmlformats.org/markup-compatibility/2006">
               <mc:Choice xmlns:v="urn:schemas-microsoft-com:vml" Requires="v">
-                <p:oleObj spid="_x0000_s3206" name="AxMath" r:id="rId15" imgW="118080" imgH="151920" progId="Equation.AxMath">
+                <p:oleObj spid="_x0000_s3248" name="AxMath" r:id="rId15" imgW="118080" imgH="151920" progId="Equation.AxMath">
                   <p:embed/>
                 </p:oleObj>
               </mc:Choice>
@@ -24779,7 +24779,7 @@
           <a:graphicData uri="http://schemas.openxmlformats.org/presentationml/2006/ole">
             <mc:AlternateContent xmlns:mc="http://schemas.openxmlformats.org/markup-compatibility/2006">
               <mc:Choice xmlns:v="urn:schemas-microsoft-com:vml" Requires="v">
-                <p:oleObj spid="_x0000_s3207" name="AxMath" r:id="rId16" imgW="123120" imgH="151920" progId="Equation.AxMath">
+                <p:oleObj spid="_x0000_s3249" name="AxMath" r:id="rId16" imgW="123120" imgH="151920" progId="Equation.AxMath">
                   <p:embed/>
                 </p:oleObj>
               </mc:Choice>
@@ -24844,7 +24844,7 @@
           <a:graphicData uri="http://schemas.openxmlformats.org/presentationml/2006/ole">
             <mc:AlternateContent xmlns:mc="http://schemas.openxmlformats.org/markup-compatibility/2006">
               <mc:Choice xmlns:v="urn:schemas-microsoft-com:vml" Requires="v">
-                <p:oleObj spid="_x0000_s3208" name="AxMath" r:id="rId17" imgW="123840" imgH="151920" progId="Equation.AxMath">
+                <p:oleObj spid="_x0000_s3250" name="AxMath" r:id="rId17" imgW="123840" imgH="151920" progId="Equation.AxMath">
                   <p:embed/>
                 </p:oleObj>
               </mc:Choice>
@@ -24909,7 +24909,7 @@
           <a:graphicData uri="http://schemas.openxmlformats.org/presentationml/2006/ole">
             <mc:AlternateContent xmlns:mc="http://schemas.openxmlformats.org/markup-compatibility/2006">
               <mc:Choice xmlns:v="urn:schemas-microsoft-com:vml" Requires="v">
-                <p:oleObj spid="_x0000_s3209" name="AxMath" r:id="rId18" imgW="236160" imgH="151920" progId="Equation.AxMath">
+                <p:oleObj spid="_x0000_s3251" name="AxMath" r:id="rId18" imgW="236160" imgH="151920" progId="Equation.AxMath">
                   <p:embed/>
                 </p:oleObj>
               </mc:Choice>
@@ -24974,7 +24974,7 @@
           <a:graphicData uri="http://schemas.openxmlformats.org/presentationml/2006/ole">
             <mc:AlternateContent xmlns:mc="http://schemas.openxmlformats.org/markup-compatibility/2006">
               <mc:Choice xmlns:v="urn:schemas-microsoft-com:vml" Requires="v">
-                <p:oleObj spid="_x0000_s3210" name="AxMath" r:id="rId19" imgW="231840" imgH="151920" progId="Equation.AxMath">
+                <p:oleObj spid="_x0000_s3252" name="AxMath" r:id="rId19" imgW="231840" imgH="151920" progId="Equation.AxMath">
                   <p:embed/>
                 </p:oleObj>
               </mc:Choice>
@@ -25039,7 +25039,7 @@
           <a:graphicData uri="http://schemas.openxmlformats.org/presentationml/2006/ole">
             <mc:AlternateContent xmlns:mc="http://schemas.openxmlformats.org/markup-compatibility/2006">
               <mc:Choice xmlns:v="urn:schemas-microsoft-com:vml" Requires="v">
-                <p:oleObj spid="_x0000_s3211" name="AxMath" r:id="rId20" imgW="135360" imgH="151920" progId="Equation.AxMath">
+                <p:oleObj spid="_x0000_s3253" name="AxMath" r:id="rId20" imgW="135360" imgH="151920" progId="Equation.AxMath">
                   <p:embed/>
                 </p:oleObj>
               </mc:Choice>
@@ -25104,7 +25104,7 @@
           <a:graphicData uri="http://schemas.openxmlformats.org/presentationml/2006/ole">
             <mc:AlternateContent xmlns:mc="http://schemas.openxmlformats.org/markup-compatibility/2006">
               <mc:Choice xmlns:v="urn:schemas-microsoft-com:vml" Requires="v">
-                <p:oleObj spid="_x0000_s3212" name="AxMath" r:id="rId21" imgW="107640" imgH="151920" progId="Equation.AxMath">
+                <p:oleObj spid="_x0000_s3254" name="AxMath" r:id="rId21" imgW="107640" imgH="151920" progId="Equation.AxMath">
                   <p:embed/>
                 </p:oleObj>
               </mc:Choice>
@@ -25169,7 +25169,7 @@
           <a:graphicData uri="http://schemas.openxmlformats.org/presentationml/2006/ole">
             <mc:AlternateContent xmlns:mc="http://schemas.openxmlformats.org/markup-compatibility/2006">
               <mc:Choice xmlns:v="urn:schemas-microsoft-com:vml" Requires="v">
-                <p:oleObj spid="_x0000_s3213" name="AxMath" r:id="rId23" imgW="111960" imgH="151920" progId="Equation.AxMath">
+                <p:oleObj spid="_x0000_s3255" name="AxMath" r:id="rId23" imgW="111960" imgH="151920" progId="Equation.AxMath">
                   <p:embed/>
                 </p:oleObj>
               </mc:Choice>
@@ -25234,7 +25234,7 @@
           <a:graphicData uri="http://schemas.openxmlformats.org/presentationml/2006/ole">
             <mc:AlternateContent xmlns:mc="http://schemas.openxmlformats.org/markup-compatibility/2006">
               <mc:Choice xmlns:v="urn:schemas-microsoft-com:vml" Requires="v">
-                <p:oleObj spid="_x0000_s3214" name="AxMath" r:id="rId25" imgW="113040" imgH="151920" progId="Equation.AxMath">
+                <p:oleObj spid="_x0000_s3256" name="AxMath" r:id="rId25" imgW="113040" imgH="151920" progId="Equation.AxMath">
                   <p:embed/>
                 </p:oleObj>
               </mc:Choice>
@@ -25299,7 +25299,7 @@
           <a:graphicData uri="http://schemas.openxmlformats.org/presentationml/2006/ole">
             <mc:AlternateContent xmlns:mc="http://schemas.openxmlformats.org/markup-compatibility/2006">
               <mc:Choice xmlns:v="urn:schemas-microsoft-com:vml" Requires="v">
-                <p:oleObj spid="_x0000_s3215" name="AxMath" r:id="rId27" imgW="225720" imgH="151920" progId="Equation.AxMath">
+                <p:oleObj spid="_x0000_s3257" name="AxMath" r:id="rId27" imgW="225720" imgH="151920" progId="Equation.AxMath">
                   <p:embed/>
                 </p:oleObj>
               </mc:Choice>
@@ -25364,7 +25364,7 @@
           <a:graphicData uri="http://schemas.openxmlformats.org/presentationml/2006/ole">
             <mc:AlternateContent xmlns:mc="http://schemas.openxmlformats.org/markup-compatibility/2006">
               <mc:Choice xmlns:v="urn:schemas-microsoft-com:vml" Requires="v">
-                <p:oleObj spid="_x0000_s3216" name="AxMath" r:id="rId29" imgW="220680" imgH="151920" progId="Equation.AxMath">
+                <p:oleObj spid="_x0000_s3258" name="AxMath" r:id="rId29" imgW="220680" imgH="151920" progId="Equation.AxMath">
                   <p:embed/>
                 </p:oleObj>
               </mc:Choice>
@@ -25429,7 +25429,7 @@
           <a:graphicData uri="http://schemas.openxmlformats.org/presentationml/2006/ole">
             <mc:AlternateContent xmlns:mc="http://schemas.openxmlformats.org/markup-compatibility/2006">
               <mc:Choice xmlns:v="urn:schemas-microsoft-com:vml" Requires="v">
-                <p:oleObj spid="_x0000_s3217" name="AxMath" r:id="rId31" imgW="124920" imgH="151920" progId="Equation.AxMath">
+                <p:oleObj spid="_x0000_s3259" name="AxMath" r:id="rId31" imgW="124920" imgH="151920" progId="Equation.AxMath">
                   <p:embed/>
                 </p:oleObj>
               </mc:Choice>
@@ -25594,7 +25594,7 @@
           <a:graphicData uri="http://schemas.openxmlformats.org/presentationml/2006/ole">
             <mc:AlternateContent xmlns:mc="http://schemas.openxmlformats.org/markup-compatibility/2006">
               <mc:Choice xmlns:v="urn:schemas-microsoft-com:vml" Requires="v">
-                <p:oleObj spid="_x0000_s3218" name="AxMath" r:id="rId33" imgW="96840" imgH="226800" progId="Equation.AxMath">
+                <p:oleObj spid="_x0000_s3260" name="AxMath" r:id="rId33" imgW="96840" imgH="226800" progId="Equation.AxMath">
                   <p:embed/>
                 </p:oleObj>
               </mc:Choice>
@@ -25645,7 +25645,7 @@
           <a:graphicData uri="http://schemas.openxmlformats.org/presentationml/2006/ole">
             <mc:AlternateContent xmlns:mc="http://schemas.openxmlformats.org/markup-compatibility/2006">
               <mc:Choice xmlns:v="urn:schemas-microsoft-com:vml" Requires="v">
-                <p:oleObj spid="_x0000_s3219" name="AxMath" r:id="rId35" imgW="117360" imgH="226800" progId="Equation.AxMath">
+                <p:oleObj spid="_x0000_s3261" name="AxMath" r:id="rId35" imgW="117360" imgH="226800" progId="Equation.AxMath">
                   <p:embed/>
                 </p:oleObj>
               </mc:Choice>
@@ -25696,7 +25696,7 @@
           <a:graphicData uri="http://schemas.openxmlformats.org/presentationml/2006/ole">
             <mc:AlternateContent xmlns:mc="http://schemas.openxmlformats.org/markup-compatibility/2006">
               <mc:Choice xmlns:v="urn:schemas-microsoft-com:vml" Requires="v">
-                <p:oleObj spid="_x0000_s3220" name="AxMath" r:id="rId37" imgW="152280" imgH="226800" progId="Equation.AxMath">
+                <p:oleObj spid="_x0000_s3262" name="AxMath" r:id="rId37" imgW="152280" imgH="226800" progId="Equation.AxMath">
                   <p:embed/>
                 </p:oleObj>
               </mc:Choice>

--- a/figure/ICPP.pptx
+++ b/figure/ICPP.pptx
@@ -215,7 +215,7 @@
           <a:p>
             <a:fld id="{DCE91CFC-8265-4471-8BD5-BB46E1DDD310}" type="datetimeFigureOut">
               <a:rPr lang="zh-CN" altLang="en-US" smtClean="0"/>
-              <a:t>2023/12/10</a:t>
+              <a:t>2023/12/11</a:t>
             </a:fld>
             <a:endParaRPr lang="zh-CN" altLang="en-US"/>
           </a:p>
@@ -1118,7 +1118,7 @@
           <a:p>
             <a:fld id="{4EEC62D4-A96C-41D8-B31A-4F9640C07160}" type="datetimeFigureOut">
               <a:rPr lang="zh-CN" altLang="en-US" smtClean="0"/>
-              <a:t>2023/12/10</a:t>
+              <a:t>2023/12/11</a:t>
             </a:fld>
             <a:endParaRPr lang="zh-CN" altLang="en-US"/>
           </a:p>
@@ -1288,7 +1288,7 @@
           <a:p>
             <a:fld id="{4EEC62D4-A96C-41D8-B31A-4F9640C07160}" type="datetimeFigureOut">
               <a:rPr lang="zh-CN" altLang="en-US" smtClean="0"/>
-              <a:t>2023/12/10</a:t>
+              <a:t>2023/12/11</a:t>
             </a:fld>
             <a:endParaRPr lang="zh-CN" altLang="en-US"/>
           </a:p>
@@ -1468,7 +1468,7 @@
           <a:p>
             <a:fld id="{4EEC62D4-A96C-41D8-B31A-4F9640C07160}" type="datetimeFigureOut">
               <a:rPr lang="zh-CN" altLang="en-US" smtClean="0"/>
-              <a:t>2023/12/10</a:t>
+              <a:t>2023/12/11</a:t>
             </a:fld>
             <a:endParaRPr lang="zh-CN" altLang="en-US"/>
           </a:p>
@@ -1638,7 +1638,7 @@
           <a:p>
             <a:fld id="{4EEC62D4-A96C-41D8-B31A-4F9640C07160}" type="datetimeFigureOut">
               <a:rPr lang="zh-CN" altLang="en-US" smtClean="0"/>
-              <a:t>2023/12/10</a:t>
+              <a:t>2023/12/11</a:t>
             </a:fld>
             <a:endParaRPr lang="zh-CN" altLang="en-US"/>
           </a:p>
@@ -1884,7 +1884,7 @@
           <a:p>
             <a:fld id="{4EEC62D4-A96C-41D8-B31A-4F9640C07160}" type="datetimeFigureOut">
               <a:rPr lang="zh-CN" altLang="en-US" smtClean="0"/>
-              <a:t>2023/12/10</a:t>
+              <a:t>2023/12/11</a:t>
             </a:fld>
             <a:endParaRPr lang="zh-CN" altLang="en-US"/>
           </a:p>
@@ -2116,7 +2116,7 @@
           <a:p>
             <a:fld id="{4EEC62D4-A96C-41D8-B31A-4F9640C07160}" type="datetimeFigureOut">
               <a:rPr lang="zh-CN" altLang="en-US" smtClean="0"/>
-              <a:t>2023/12/10</a:t>
+              <a:t>2023/12/11</a:t>
             </a:fld>
             <a:endParaRPr lang="zh-CN" altLang="en-US"/>
           </a:p>
@@ -2483,7 +2483,7 @@
           <a:p>
             <a:fld id="{4EEC62D4-A96C-41D8-B31A-4F9640C07160}" type="datetimeFigureOut">
               <a:rPr lang="zh-CN" altLang="en-US" smtClean="0"/>
-              <a:t>2023/12/10</a:t>
+              <a:t>2023/12/11</a:t>
             </a:fld>
             <a:endParaRPr lang="zh-CN" altLang="en-US"/>
           </a:p>
@@ -2601,7 +2601,7 @@
           <a:p>
             <a:fld id="{4EEC62D4-A96C-41D8-B31A-4F9640C07160}" type="datetimeFigureOut">
               <a:rPr lang="zh-CN" altLang="en-US" smtClean="0"/>
-              <a:t>2023/12/10</a:t>
+              <a:t>2023/12/11</a:t>
             </a:fld>
             <a:endParaRPr lang="zh-CN" altLang="en-US"/>
           </a:p>
@@ -2696,7 +2696,7 @@
           <a:p>
             <a:fld id="{4EEC62D4-A96C-41D8-B31A-4F9640C07160}" type="datetimeFigureOut">
               <a:rPr lang="zh-CN" altLang="en-US" smtClean="0"/>
-              <a:t>2023/12/10</a:t>
+              <a:t>2023/12/11</a:t>
             </a:fld>
             <a:endParaRPr lang="zh-CN" altLang="en-US"/>
           </a:p>
@@ -2973,7 +2973,7 @@
           <a:p>
             <a:fld id="{4EEC62D4-A96C-41D8-B31A-4F9640C07160}" type="datetimeFigureOut">
               <a:rPr lang="zh-CN" altLang="en-US" smtClean="0"/>
-              <a:t>2023/12/10</a:t>
+              <a:t>2023/12/11</a:t>
             </a:fld>
             <a:endParaRPr lang="zh-CN" altLang="en-US"/>
           </a:p>
@@ -3226,7 +3226,7 @@
           <a:p>
             <a:fld id="{4EEC62D4-A96C-41D8-B31A-4F9640C07160}" type="datetimeFigureOut">
               <a:rPr lang="zh-CN" altLang="en-US" smtClean="0"/>
-              <a:t>2023/12/10</a:t>
+              <a:t>2023/12/11</a:t>
             </a:fld>
             <a:endParaRPr lang="zh-CN" altLang="en-US"/>
           </a:p>
@@ -3439,7 +3439,7 @@
           <a:p>
             <a:fld id="{4EEC62D4-A96C-41D8-B31A-4F9640C07160}" type="datetimeFigureOut">
               <a:rPr lang="zh-CN" altLang="en-US" smtClean="0"/>
-              <a:t>2023/12/10</a:t>
+              <a:t>2023/12/11</a:t>
             </a:fld>
             <a:endParaRPr lang="zh-CN" altLang="en-US"/>
           </a:p>
@@ -12352,7 +12352,7 @@
           <a:graphicData uri="http://schemas.openxmlformats.org/presentationml/2006/ole">
             <mc:AlternateContent xmlns:mc="http://schemas.openxmlformats.org/markup-compatibility/2006">
               <mc:Choice xmlns:v="urn:schemas-microsoft-com:vml" Requires="v">
-                <p:oleObj spid="_x0000_s1068" name="AxMath" r:id="rId3" imgW="315000" imgH="228600" progId="Equation.AxMath">
+                <p:oleObj spid="_x0000_s1071" name="AxMath" r:id="rId3" imgW="315000" imgH="228600" progId="Equation.AxMath">
                   <p:embed/>
                 </p:oleObj>
               </mc:Choice>
@@ -12409,7 +12409,7 @@
           <a:graphicData uri="http://schemas.openxmlformats.org/presentationml/2006/ole">
             <mc:AlternateContent xmlns:mc="http://schemas.openxmlformats.org/markup-compatibility/2006">
               <mc:Choice xmlns:v="urn:schemas-microsoft-com:vml" Requires="v">
-                <p:oleObj spid="_x0000_s1069" name="AxMath" r:id="rId5" imgW="347760" imgH="228600" progId="Equation.AxMath">
+                <p:oleObj spid="_x0000_s1072" name="AxMath" r:id="rId5" imgW="347760" imgH="228600" progId="Equation.AxMath">
                   <p:embed/>
                 </p:oleObj>
               </mc:Choice>
@@ -12466,7 +12466,7 @@
           <a:graphicData uri="http://schemas.openxmlformats.org/presentationml/2006/ole">
             <mc:AlternateContent xmlns:mc="http://schemas.openxmlformats.org/markup-compatibility/2006">
               <mc:Choice xmlns:v="urn:schemas-microsoft-com:vml" Requires="v">
-                <p:oleObj spid="_x0000_s1070" name="AxMath" r:id="rId7" imgW="378000" imgH="228600" progId="Equation.AxMath">
+                <p:oleObj spid="_x0000_s1073" name="AxMath" r:id="rId7" imgW="378000" imgH="228600" progId="Equation.AxMath">
                   <p:embed/>
                 </p:oleObj>
               </mc:Choice>
@@ -13608,7 +13608,7 @@
           <a:graphicData uri="http://schemas.openxmlformats.org/presentationml/2006/ole">
             <mc:AlternateContent xmlns:mc="http://schemas.openxmlformats.org/markup-compatibility/2006">
               <mc:Choice xmlns:v="urn:schemas-microsoft-com:vml" Requires="v">
-                <p:oleObj spid="_x0000_s2290" name="AxMath" r:id="rId3" imgW="297360" imgH="151920" progId="Equation.AxMath">
+                <p:oleObj spid="_x0000_s2311" name="AxMath" r:id="rId3" imgW="297360" imgH="151920" progId="Equation.AxMath">
                   <p:embed/>
                 </p:oleObj>
               </mc:Choice>
@@ -14489,7 +14489,7 @@
           <a:graphicData uri="http://schemas.openxmlformats.org/presentationml/2006/ole">
             <mc:AlternateContent xmlns:mc="http://schemas.openxmlformats.org/markup-compatibility/2006">
               <mc:Choice xmlns:v="urn:schemas-microsoft-com:vml" Requires="v">
-                <p:oleObj spid="_x0000_s2291" name="AxMath" r:id="rId5" imgW="270360" imgH="151920" progId="Equation.AxMath">
+                <p:oleObj spid="_x0000_s2312" name="AxMath" r:id="rId5" imgW="270360" imgH="151920" progId="Equation.AxMath">
                   <p:embed/>
                 </p:oleObj>
               </mc:Choice>
@@ -14558,7 +14558,7 @@
           <a:graphicData uri="http://schemas.openxmlformats.org/presentationml/2006/ole">
             <mc:AlternateContent xmlns:mc="http://schemas.openxmlformats.org/markup-compatibility/2006">
               <mc:Choice xmlns:v="urn:schemas-microsoft-com:vml" Requires="v">
-                <p:oleObj spid="_x0000_s2292" name="AxMath" r:id="rId7" imgW="118080" imgH="151920" progId="Equation.AxMath">
+                <p:oleObj spid="_x0000_s2313" name="AxMath" r:id="rId7" imgW="118080" imgH="151920" progId="Equation.AxMath">
                   <p:embed/>
                 </p:oleObj>
               </mc:Choice>
@@ -14627,7 +14627,7 @@
           <a:graphicData uri="http://schemas.openxmlformats.org/presentationml/2006/ole">
             <mc:AlternateContent xmlns:mc="http://schemas.openxmlformats.org/markup-compatibility/2006">
               <mc:Choice xmlns:v="urn:schemas-microsoft-com:vml" Requires="v">
-                <p:oleObj spid="_x0000_s2293" name="AxMath" r:id="rId9" imgW="306360" imgH="151920" progId="Equation.AxMath">
+                <p:oleObj spid="_x0000_s2314" name="AxMath" r:id="rId9" imgW="306360" imgH="151920" progId="Equation.AxMath">
                   <p:embed/>
                 </p:oleObj>
               </mc:Choice>
@@ -14696,7 +14696,7 @@
           <a:graphicData uri="http://schemas.openxmlformats.org/presentationml/2006/ole">
             <mc:AlternateContent xmlns:mc="http://schemas.openxmlformats.org/markup-compatibility/2006">
               <mc:Choice xmlns:v="urn:schemas-microsoft-com:vml" Requires="v">
-                <p:oleObj spid="_x0000_s2294" name="AxMath" r:id="rId11" imgW="123120" imgH="151920" progId="Equation.AxMath">
+                <p:oleObj spid="_x0000_s2315" name="AxMath" r:id="rId11" imgW="123120" imgH="151920" progId="Equation.AxMath">
                   <p:embed/>
                 </p:oleObj>
               </mc:Choice>
@@ -14765,7 +14765,7 @@
           <a:graphicData uri="http://schemas.openxmlformats.org/presentationml/2006/ole">
             <mc:AlternateContent xmlns:mc="http://schemas.openxmlformats.org/markup-compatibility/2006">
               <mc:Choice xmlns:v="urn:schemas-microsoft-com:vml" Requires="v">
-                <p:oleObj spid="_x0000_s2295" name="AxMath" r:id="rId13" imgW="123840" imgH="151920" progId="Equation.AxMath">
+                <p:oleObj spid="_x0000_s2316" name="AxMath" r:id="rId13" imgW="123840" imgH="151920" progId="Equation.AxMath">
                   <p:embed/>
                 </p:oleObj>
               </mc:Choice>
@@ -14834,7 +14834,7 @@
           <a:graphicData uri="http://schemas.openxmlformats.org/presentationml/2006/ole">
             <mc:AlternateContent xmlns:mc="http://schemas.openxmlformats.org/markup-compatibility/2006">
               <mc:Choice xmlns:v="urn:schemas-microsoft-com:vml" Requires="v">
-                <p:oleObj spid="_x0000_s2296" name="AxMath" r:id="rId15" imgW="210240" imgH="151920" progId="Equation.AxMath">
+                <p:oleObj spid="_x0000_s2317" name="AxMath" r:id="rId15" imgW="210240" imgH="151920" progId="Equation.AxMath">
                   <p:embed/>
                 </p:oleObj>
               </mc:Choice>
@@ -14903,7 +14903,7 @@
           <a:graphicData uri="http://schemas.openxmlformats.org/presentationml/2006/ole">
             <mc:AlternateContent xmlns:mc="http://schemas.openxmlformats.org/markup-compatibility/2006">
               <mc:Choice xmlns:v="urn:schemas-microsoft-com:vml" Requires="v">
-                <p:oleObj spid="_x0000_s2297" name="AxMath" r:id="rId17" imgW="205560" imgH="151920" progId="Equation.AxMath">
+                <p:oleObj spid="_x0000_s2318" name="AxMath" r:id="rId17" imgW="205560" imgH="151920" progId="Equation.AxMath">
                   <p:embed/>
                 </p:oleObj>
               </mc:Choice>
@@ -14972,7 +14972,7 @@
           <a:graphicData uri="http://schemas.openxmlformats.org/presentationml/2006/ole">
             <mc:AlternateContent xmlns:mc="http://schemas.openxmlformats.org/markup-compatibility/2006">
               <mc:Choice xmlns:v="urn:schemas-microsoft-com:vml" Requires="v">
-                <p:oleObj spid="_x0000_s2298" name="AxMath" r:id="rId19" imgW="109440" imgH="151920" progId="Equation.AxMath">
+                <p:oleObj spid="_x0000_s2319" name="AxMath" r:id="rId19" imgW="109440" imgH="151920" progId="Equation.AxMath">
                   <p:embed/>
                 </p:oleObj>
               </mc:Choice>
@@ -15481,7 +15481,7 @@
           <a:graphicData uri="http://schemas.openxmlformats.org/presentationml/2006/ole">
             <mc:AlternateContent xmlns:mc="http://schemas.openxmlformats.org/markup-compatibility/2006">
               <mc:Choice xmlns:v="urn:schemas-microsoft-com:vml" Requires="v">
-                <p:oleObj spid="_x0000_s2299" name="AxMath" r:id="rId21" imgW="118080" imgH="151920" progId="Equation.AxMath">
+                <p:oleObj spid="_x0000_s2320" name="AxMath" r:id="rId21" imgW="118080" imgH="151920" progId="Equation.AxMath">
                   <p:embed/>
                 </p:oleObj>
               </mc:Choice>
@@ -15550,7 +15550,7 @@
           <a:graphicData uri="http://schemas.openxmlformats.org/presentationml/2006/ole">
             <mc:AlternateContent xmlns:mc="http://schemas.openxmlformats.org/markup-compatibility/2006">
               <mc:Choice xmlns:v="urn:schemas-microsoft-com:vml" Requires="v">
-                <p:oleObj spid="_x0000_s2300" name="AxMath" r:id="rId22" imgW="123120" imgH="151920" progId="Equation.AxMath">
+                <p:oleObj spid="_x0000_s2321" name="AxMath" r:id="rId22" imgW="123120" imgH="151920" progId="Equation.AxMath">
                   <p:embed/>
                 </p:oleObj>
               </mc:Choice>
@@ -15619,7 +15619,7 @@
           <a:graphicData uri="http://schemas.openxmlformats.org/presentationml/2006/ole">
             <mc:AlternateContent xmlns:mc="http://schemas.openxmlformats.org/markup-compatibility/2006">
               <mc:Choice xmlns:v="urn:schemas-microsoft-com:vml" Requires="v">
-                <p:oleObj spid="_x0000_s2301" name="AxMath" r:id="rId23" imgW="123840" imgH="151920" progId="Equation.AxMath">
+                <p:oleObj spid="_x0000_s2322" name="AxMath" r:id="rId23" imgW="123840" imgH="151920" progId="Equation.AxMath">
                   <p:embed/>
                 </p:oleObj>
               </mc:Choice>
@@ -15688,7 +15688,7 @@
           <a:graphicData uri="http://schemas.openxmlformats.org/presentationml/2006/ole">
             <mc:AlternateContent xmlns:mc="http://schemas.openxmlformats.org/markup-compatibility/2006">
               <mc:Choice xmlns:v="urn:schemas-microsoft-com:vml" Requires="v">
-                <p:oleObj spid="_x0000_s2302" name="AxMath" r:id="rId24" imgW="210240" imgH="151920" progId="Equation.AxMath">
+                <p:oleObj spid="_x0000_s2323" name="AxMath" r:id="rId24" imgW="210240" imgH="151920" progId="Equation.AxMath">
                   <p:embed/>
                 </p:oleObj>
               </mc:Choice>
@@ -15757,7 +15757,7 @@
           <a:graphicData uri="http://schemas.openxmlformats.org/presentationml/2006/ole">
             <mc:AlternateContent xmlns:mc="http://schemas.openxmlformats.org/markup-compatibility/2006">
               <mc:Choice xmlns:v="urn:schemas-microsoft-com:vml" Requires="v">
-                <p:oleObj spid="_x0000_s2303" name="AxMath" r:id="rId25" imgW="205560" imgH="151920" progId="Equation.AxMath">
+                <p:oleObj spid="_x0000_s2324" name="AxMath" r:id="rId25" imgW="205560" imgH="151920" progId="Equation.AxMath">
                   <p:embed/>
                 </p:oleObj>
               </mc:Choice>
@@ -15826,7 +15826,7 @@
           <a:graphicData uri="http://schemas.openxmlformats.org/presentationml/2006/ole">
             <mc:AlternateContent xmlns:mc="http://schemas.openxmlformats.org/markup-compatibility/2006">
               <mc:Choice xmlns:v="urn:schemas-microsoft-com:vml" Requires="v">
-                <p:oleObj spid="_x0000_s2304" name="AxMath" r:id="rId26" imgW="109440" imgH="151920" progId="Equation.AxMath">
+                <p:oleObj spid="_x0000_s2325" name="AxMath" r:id="rId26" imgW="109440" imgH="151920" progId="Equation.AxMath">
                   <p:embed/>
                 </p:oleObj>
               </mc:Choice>
@@ -15895,7 +15895,7 @@
           <a:graphicData uri="http://schemas.openxmlformats.org/presentationml/2006/ole">
             <mc:AlternateContent xmlns:mc="http://schemas.openxmlformats.org/markup-compatibility/2006">
               <mc:Choice xmlns:v="urn:schemas-microsoft-com:vml" Requires="v">
-                <p:oleObj spid="_x0000_s2305" name="AxMath" r:id="rId27" imgW="107640" imgH="151920" progId="Equation.AxMath">
+                <p:oleObj spid="_x0000_s2326" name="AxMath" r:id="rId27" imgW="107640" imgH="151920" progId="Equation.AxMath">
                   <p:embed/>
                 </p:oleObj>
               </mc:Choice>
@@ -15964,7 +15964,7 @@
           <a:graphicData uri="http://schemas.openxmlformats.org/presentationml/2006/ole">
             <mc:AlternateContent xmlns:mc="http://schemas.openxmlformats.org/markup-compatibility/2006">
               <mc:Choice xmlns:v="urn:schemas-microsoft-com:vml" Requires="v">
-                <p:oleObj spid="_x0000_s2306" name="AxMath" r:id="rId29" imgW="111960" imgH="151920" progId="Equation.AxMath">
+                <p:oleObj spid="_x0000_s2327" name="AxMath" r:id="rId29" imgW="111960" imgH="151920" progId="Equation.AxMath">
                   <p:embed/>
                 </p:oleObj>
               </mc:Choice>
@@ -16033,7 +16033,7 @@
           <a:graphicData uri="http://schemas.openxmlformats.org/presentationml/2006/ole">
             <mc:AlternateContent xmlns:mc="http://schemas.openxmlformats.org/markup-compatibility/2006">
               <mc:Choice xmlns:v="urn:schemas-microsoft-com:vml" Requires="v">
-                <p:oleObj spid="_x0000_s2307" name="AxMath" r:id="rId31" imgW="113040" imgH="151920" progId="Equation.AxMath">
+                <p:oleObj spid="_x0000_s2328" name="AxMath" r:id="rId31" imgW="113040" imgH="151920" progId="Equation.AxMath">
                   <p:embed/>
                 </p:oleObj>
               </mc:Choice>
@@ -16102,7 +16102,7 @@
           <a:graphicData uri="http://schemas.openxmlformats.org/presentationml/2006/ole">
             <mc:AlternateContent xmlns:mc="http://schemas.openxmlformats.org/markup-compatibility/2006">
               <mc:Choice xmlns:v="urn:schemas-microsoft-com:vml" Requires="v">
-                <p:oleObj spid="_x0000_s2308" name="AxMath" r:id="rId33" imgW="199440" imgH="151920" progId="Equation.AxMath">
+                <p:oleObj spid="_x0000_s2329" name="AxMath" r:id="rId33" imgW="199440" imgH="151920" progId="Equation.AxMath">
                   <p:embed/>
                 </p:oleObj>
               </mc:Choice>
@@ -16171,7 +16171,7 @@
           <a:graphicData uri="http://schemas.openxmlformats.org/presentationml/2006/ole">
             <mc:AlternateContent xmlns:mc="http://schemas.openxmlformats.org/markup-compatibility/2006">
               <mc:Choice xmlns:v="urn:schemas-microsoft-com:vml" Requires="v">
-                <p:oleObj spid="_x0000_s2309" name="AxMath" r:id="rId35" imgW="194760" imgH="151920" progId="Equation.AxMath">
+                <p:oleObj spid="_x0000_s2330" name="AxMath" r:id="rId35" imgW="194760" imgH="151920" progId="Equation.AxMath">
                   <p:embed/>
                 </p:oleObj>
               </mc:Choice>
@@ -16240,7 +16240,7 @@
           <a:graphicData uri="http://schemas.openxmlformats.org/presentationml/2006/ole">
             <mc:AlternateContent xmlns:mc="http://schemas.openxmlformats.org/markup-compatibility/2006">
               <mc:Choice xmlns:v="urn:schemas-microsoft-com:vml" Requires="v">
-                <p:oleObj spid="_x0000_s2310" name="AxMath" r:id="rId37" imgW="98280" imgH="151920" progId="Equation.AxMath">
+                <p:oleObj spid="_x0000_s2331" name="AxMath" r:id="rId37" imgW="98280" imgH="151920" progId="Equation.AxMath">
                   <p:embed/>
                 </p:oleObj>
               </mc:Choice>
@@ -23884,7 +23884,7 @@
           <a:graphicData uri="http://schemas.openxmlformats.org/presentationml/2006/ole">
             <mc:AlternateContent xmlns:mc="http://schemas.openxmlformats.org/markup-compatibility/2006">
               <mc:Choice xmlns:v="urn:schemas-microsoft-com:vml" Requires="v">
-                <p:oleObj spid="_x0000_s3242" name="AxMath" r:id="rId3" imgW="118080" imgH="151920" progId="Equation.AxMath">
+                <p:oleObj spid="_x0000_s3263" name="AxMath" r:id="rId3" imgW="118080" imgH="151920" progId="Equation.AxMath">
                   <p:embed/>
                 </p:oleObj>
               </mc:Choice>
@@ -23949,7 +23949,7 @@
           <a:graphicData uri="http://schemas.openxmlformats.org/presentationml/2006/ole">
             <mc:AlternateContent xmlns:mc="http://schemas.openxmlformats.org/markup-compatibility/2006">
               <mc:Choice xmlns:v="urn:schemas-microsoft-com:vml" Requires="v">
-                <p:oleObj spid="_x0000_s3243" name="AxMath" r:id="rId5" imgW="123120" imgH="151920" progId="Equation.AxMath">
+                <p:oleObj spid="_x0000_s3264" name="AxMath" r:id="rId5" imgW="123120" imgH="151920" progId="Equation.AxMath">
                   <p:embed/>
                 </p:oleObj>
               </mc:Choice>
@@ -24014,7 +24014,7 @@
           <a:graphicData uri="http://schemas.openxmlformats.org/presentationml/2006/ole">
             <mc:AlternateContent xmlns:mc="http://schemas.openxmlformats.org/markup-compatibility/2006">
               <mc:Choice xmlns:v="urn:schemas-microsoft-com:vml" Requires="v">
-                <p:oleObj spid="_x0000_s3244" name="AxMath" r:id="rId7" imgW="123840" imgH="151920" progId="Equation.AxMath">
+                <p:oleObj spid="_x0000_s3265" name="AxMath" r:id="rId7" imgW="123840" imgH="151920" progId="Equation.AxMath">
                   <p:embed/>
                 </p:oleObj>
               </mc:Choice>
@@ -24079,7 +24079,7 @@
           <a:graphicData uri="http://schemas.openxmlformats.org/presentationml/2006/ole">
             <mc:AlternateContent xmlns:mc="http://schemas.openxmlformats.org/markup-compatibility/2006">
               <mc:Choice xmlns:v="urn:schemas-microsoft-com:vml" Requires="v">
-                <p:oleObj spid="_x0000_s3245" name="AxMath" r:id="rId9" imgW="236160" imgH="151920" progId="Equation.AxMath">
+                <p:oleObj spid="_x0000_s3266" name="AxMath" r:id="rId9" imgW="236160" imgH="151920" progId="Equation.AxMath">
                   <p:embed/>
                 </p:oleObj>
               </mc:Choice>
@@ -24144,7 +24144,7 @@
           <a:graphicData uri="http://schemas.openxmlformats.org/presentationml/2006/ole">
             <mc:AlternateContent xmlns:mc="http://schemas.openxmlformats.org/markup-compatibility/2006">
               <mc:Choice xmlns:v="urn:schemas-microsoft-com:vml" Requires="v">
-                <p:oleObj spid="_x0000_s3246" name="AxMath" r:id="rId11" imgW="231840" imgH="151920" progId="Equation.AxMath">
+                <p:oleObj spid="_x0000_s3267" name="AxMath" r:id="rId11" imgW="231840" imgH="151920" progId="Equation.AxMath">
                   <p:embed/>
                 </p:oleObj>
               </mc:Choice>
@@ -24209,7 +24209,7 @@
           <a:graphicData uri="http://schemas.openxmlformats.org/presentationml/2006/ole">
             <mc:AlternateContent xmlns:mc="http://schemas.openxmlformats.org/markup-compatibility/2006">
               <mc:Choice xmlns:v="urn:schemas-microsoft-com:vml" Requires="v">
-                <p:oleObj spid="_x0000_s3247" name="AxMath" r:id="rId13" imgW="135360" imgH="151920" progId="Equation.AxMath">
+                <p:oleObj spid="_x0000_s3268" name="AxMath" r:id="rId13" imgW="135360" imgH="151920" progId="Equation.AxMath">
                   <p:embed/>
                 </p:oleObj>
               </mc:Choice>
@@ -24714,7 +24714,7 @@
           <a:graphicData uri="http://schemas.openxmlformats.org/presentationml/2006/ole">
             <mc:AlternateContent xmlns:mc="http://schemas.openxmlformats.org/markup-compatibility/2006">
               <mc:Choice xmlns:v="urn:schemas-microsoft-com:vml" Requires="v">
-                <p:oleObj spid="_x0000_s3248" name="AxMath" r:id="rId15" imgW="118080" imgH="151920" progId="Equation.AxMath">
+                <p:oleObj spid="_x0000_s3269" name="AxMath" r:id="rId15" imgW="118080" imgH="151920" progId="Equation.AxMath">
                   <p:embed/>
                 </p:oleObj>
               </mc:Choice>
@@ -24779,7 +24779,7 @@
           <a:graphicData uri="http://schemas.openxmlformats.org/presentationml/2006/ole">
             <mc:AlternateContent xmlns:mc="http://schemas.openxmlformats.org/markup-compatibility/2006">
               <mc:Choice xmlns:v="urn:schemas-microsoft-com:vml" Requires="v">
-                <p:oleObj spid="_x0000_s3249" name="AxMath" r:id="rId16" imgW="123120" imgH="151920" progId="Equation.AxMath">
+                <p:oleObj spid="_x0000_s3270" name="AxMath" r:id="rId16" imgW="123120" imgH="151920" progId="Equation.AxMath">
                   <p:embed/>
                 </p:oleObj>
               </mc:Choice>
@@ -24844,7 +24844,7 @@
           <a:graphicData uri="http://schemas.openxmlformats.org/presentationml/2006/ole">
             <mc:AlternateContent xmlns:mc="http://schemas.openxmlformats.org/markup-compatibility/2006">
               <mc:Choice xmlns:v="urn:schemas-microsoft-com:vml" Requires="v">
-                <p:oleObj spid="_x0000_s3250" name="AxMath" r:id="rId17" imgW="123840" imgH="151920" progId="Equation.AxMath">
+                <p:oleObj spid="_x0000_s3271" name="AxMath" r:id="rId17" imgW="123840" imgH="151920" progId="Equation.AxMath">
                   <p:embed/>
                 </p:oleObj>
               </mc:Choice>
@@ -24909,7 +24909,7 @@
           <a:graphicData uri="http://schemas.openxmlformats.org/presentationml/2006/ole">
             <mc:AlternateContent xmlns:mc="http://schemas.openxmlformats.org/markup-compatibility/2006">
               <mc:Choice xmlns:v="urn:schemas-microsoft-com:vml" Requires="v">
-                <p:oleObj spid="_x0000_s3251" name="AxMath" r:id="rId18" imgW="236160" imgH="151920" progId="Equation.AxMath">
+                <p:oleObj spid="_x0000_s3272" name="AxMath" r:id="rId18" imgW="236160" imgH="151920" progId="Equation.AxMath">
                   <p:embed/>
                 </p:oleObj>
               </mc:Choice>
@@ -24974,7 +24974,7 @@
           <a:graphicData uri="http://schemas.openxmlformats.org/presentationml/2006/ole">
             <mc:AlternateContent xmlns:mc="http://schemas.openxmlformats.org/markup-compatibility/2006">
               <mc:Choice xmlns:v="urn:schemas-microsoft-com:vml" Requires="v">
-                <p:oleObj spid="_x0000_s3252" name="AxMath" r:id="rId19" imgW="231840" imgH="151920" progId="Equation.AxMath">
+                <p:oleObj spid="_x0000_s3273" name="AxMath" r:id="rId19" imgW="231840" imgH="151920" progId="Equation.AxMath">
                   <p:embed/>
                 </p:oleObj>
               </mc:Choice>
@@ -25039,7 +25039,7 @@
           <a:graphicData uri="http://schemas.openxmlformats.org/presentationml/2006/ole">
             <mc:AlternateContent xmlns:mc="http://schemas.openxmlformats.org/markup-compatibility/2006">
               <mc:Choice xmlns:v="urn:schemas-microsoft-com:vml" Requires="v">
-                <p:oleObj spid="_x0000_s3253" name="AxMath" r:id="rId20" imgW="135360" imgH="151920" progId="Equation.AxMath">
+                <p:oleObj spid="_x0000_s3274" name="AxMath" r:id="rId20" imgW="135360" imgH="151920" progId="Equation.AxMath">
                   <p:embed/>
                 </p:oleObj>
               </mc:Choice>
@@ -25104,7 +25104,7 @@
           <a:graphicData uri="http://schemas.openxmlformats.org/presentationml/2006/ole">
             <mc:AlternateContent xmlns:mc="http://schemas.openxmlformats.org/markup-compatibility/2006">
               <mc:Choice xmlns:v="urn:schemas-microsoft-com:vml" Requires="v">
-                <p:oleObj spid="_x0000_s3254" name="AxMath" r:id="rId21" imgW="107640" imgH="151920" progId="Equation.AxMath">
+                <p:oleObj spid="_x0000_s3275" name="AxMath" r:id="rId21" imgW="107640" imgH="151920" progId="Equation.AxMath">
                   <p:embed/>
                 </p:oleObj>
               </mc:Choice>
@@ -25169,7 +25169,7 @@
           <a:graphicData uri="http://schemas.openxmlformats.org/presentationml/2006/ole">
             <mc:AlternateContent xmlns:mc="http://schemas.openxmlformats.org/markup-compatibility/2006">
               <mc:Choice xmlns:v="urn:schemas-microsoft-com:vml" Requires="v">
-                <p:oleObj spid="_x0000_s3255" name="AxMath" r:id="rId23" imgW="111960" imgH="151920" progId="Equation.AxMath">
+                <p:oleObj spid="_x0000_s3276" name="AxMath" r:id="rId23" imgW="111960" imgH="151920" progId="Equation.AxMath">
                   <p:embed/>
                 </p:oleObj>
               </mc:Choice>
@@ -25234,7 +25234,7 @@
           <a:graphicData uri="http://schemas.openxmlformats.org/presentationml/2006/ole">
             <mc:AlternateContent xmlns:mc="http://schemas.openxmlformats.org/markup-compatibility/2006">
               <mc:Choice xmlns:v="urn:schemas-microsoft-com:vml" Requires="v">
-                <p:oleObj spid="_x0000_s3256" name="AxMath" r:id="rId25" imgW="113040" imgH="151920" progId="Equation.AxMath">
+                <p:oleObj spid="_x0000_s3277" name="AxMath" r:id="rId25" imgW="113040" imgH="151920" progId="Equation.AxMath">
                   <p:embed/>
                 </p:oleObj>
               </mc:Choice>
@@ -25299,7 +25299,7 @@
           <a:graphicData uri="http://schemas.openxmlformats.org/presentationml/2006/ole">
             <mc:AlternateContent xmlns:mc="http://schemas.openxmlformats.org/markup-compatibility/2006">
               <mc:Choice xmlns:v="urn:schemas-microsoft-com:vml" Requires="v">
-                <p:oleObj spid="_x0000_s3257" name="AxMath" r:id="rId27" imgW="225720" imgH="151920" progId="Equation.AxMath">
+                <p:oleObj spid="_x0000_s3278" name="AxMath" r:id="rId27" imgW="225720" imgH="151920" progId="Equation.AxMath">
                   <p:embed/>
                 </p:oleObj>
               </mc:Choice>
@@ -25364,7 +25364,7 @@
           <a:graphicData uri="http://schemas.openxmlformats.org/presentationml/2006/ole">
             <mc:AlternateContent xmlns:mc="http://schemas.openxmlformats.org/markup-compatibility/2006">
               <mc:Choice xmlns:v="urn:schemas-microsoft-com:vml" Requires="v">
-                <p:oleObj spid="_x0000_s3258" name="AxMath" r:id="rId29" imgW="220680" imgH="151920" progId="Equation.AxMath">
+                <p:oleObj spid="_x0000_s3279" name="AxMath" r:id="rId29" imgW="220680" imgH="151920" progId="Equation.AxMath">
                   <p:embed/>
                 </p:oleObj>
               </mc:Choice>
@@ -25429,7 +25429,7 @@
           <a:graphicData uri="http://schemas.openxmlformats.org/presentationml/2006/ole">
             <mc:AlternateContent xmlns:mc="http://schemas.openxmlformats.org/markup-compatibility/2006">
               <mc:Choice xmlns:v="urn:schemas-microsoft-com:vml" Requires="v">
-                <p:oleObj spid="_x0000_s3259" name="AxMath" r:id="rId31" imgW="124920" imgH="151920" progId="Equation.AxMath">
+                <p:oleObj spid="_x0000_s3280" name="AxMath" r:id="rId31" imgW="124920" imgH="151920" progId="Equation.AxMath">
                   <p:embed/>
                 </p:oleObj>
               </mc:Choice>
@@ -25594,7 +25594,7 @@
           <a:graphicData uri="http://schemas.openxmlformats.org/presentationml/2006/ole">
             <mc:AlternateContent xmlns:mc="http://schemas.openxmlformats.org/markup-compatibility/2006">
               <mc:Choice xmlns:v="urn:schemas-microsoft-com:vml" Requires="v">
-                <p:oleObj spid="_x0000_s3260" name="AxMath" r:id="rId33" imgW="96840" imgH="226800" progId="Equation.AxMath">
+                <p:oleObj spid="_x0000_s3281" name="AxMath" r:id="rId33" imgW="96840" imgH="226800" progId="Equation.AxMath">
                   <p:embed/>
                 </p:oleObj>
               </mc:Choice>
@@ -25645,7 +25645,7 @@
           <a:graphicData uri="http://schemas.openxmlformats.org/presentationml/2006/ole">
             <mc:AlternateContent xmlns:mc="http://schemas.openxmlformats.org/markup-compatibility/2006">
               <mc:Choice xmlns:v="urn:schemas-microsoft-com:vml" Requires="v">
-                <p:oleObj spid="_x0000_s3261" name="AxMath" r:id="rId35" imgW="117360" imgH="226800" progId="Equation.AxMath">
+                <p:oleObj spid="_x0000_s3282" name="AxMath" r:id="rId35" imgW="117360" imgH="226800" progId="Equation.AxMath">
                   <p:embed/>
                 </p:oleObj>
               </mc:Choice>
@@ -25696,7 +25696,7 @@
           <a:graphicData uri="http://schemas.openxmlformats.org/presentationml/2006/ole">
             <mc:AlternateContent xmlns:mc="http://schemas.openxmlformats.org/markup-compatibility/2006">
               <mc:Choice xmlns:v="urn:schemas-microsoft-com:vml" Requires="v">
-                <p:oleObj spid="_x0000_s3262" name="AxMath" r:id="rId37" imgW="152280" imgH="226800" progId="Equation.AxMath">
+                <p:oleObj spid="_x0000_s3283" name="AxMath" r:id="rId37" imgW="152280" imgH="226800" progId="Equation.AxMath">
                   <p:embed/>
                 </p:oleObj>
               </mc:Choice>

--- a/figure/ICPP.pptx
+++ b/figure/ICPP.pptx
@@ -215,7 +215,7 @@
           <a:p>
             <a:fld id="{DCE91CFC-8265-4471-8BD5-BB46E1DDD310}" type="datetimeFigureOut">
               <a:rPr lang="zh-CN" altLang="en-US" smtClean="0"/>
-              <a:t>2023/12/11</a:t>
+              <a:t>2023/12/12</a:t>
             </a:fld>
             <a:endParaRPr lang="zh-CN" altLang="en-US"/>
           </a:p>
@@ -1118,7 +1118,7 @@
           <a:p>
             <a:fld id="{4EEC62D4-A96C-41D8-B31A-4F9640C07160}" type="datetimeFigureOut">
               <a:rPr lang="zh-CN" altLang="en-US" smtClean="0"/>
-              <a:t>2023/12/11</a:t>
+              <a:t>2023/12/12</a:t>
             </a:fld>
             <a:endParaRPr lang="zh-CN" altLang="en-US"/>
           </a:p>
@@ -1288,7 +1288,7 @@
           <a:p>
             <a:fld id="{4EEC62D4-A96C-41D8-B31A-4F9640C07160}" type="datetimeFigureOut">
               <a:rPr lang="zh-CN" altLang="en-US" smtClean="0"/>
-              <a:t>2023/12/11</a:t>
+              <a:t>2023/12/12</a:t>
             </a:fld>
             <a:endParaRPr lang="zh-CN" altLang="en-US"/>
           </a:p>
@@ -1468,7 +1468,7 @@
           <a:p>
             <a:fld id="{4EEC62D4-A96C-41D8-B31A-4F9640C07160}" type="datetimeFigureOut">
               <a:rPr lang="zh-CN" altLang="en-US" smtClean="0"/>
-              <a:t>2023/12/11</a:t>
+              <a:t>2023/12/12</a:t>
             </a:fld>
             <a:endParaRPr lang="zh-CN" altLang="en-US"/>
           </a:p>
@@ -1638,7 +1638,7 @@
           <a:p>
             <a:fld id="{4EEC62D4-A96C-41D8-B31A-4F9640C07160}" type="datetimeFigureOut">
               <a:rPr lang="zh-CN" altLang="en-US" smtClean="0"/>
-              <a:t>2023/12/11</a:t>
+              <a:t>2023/12/12</a:t>
             </a:fld>
             <a:endParaRPr lang="zh-CN" altLang="en-US"/>
           </a:p>
@@ -1884,7 +1884,7 @@
           <a:p>
             <a:fld id="{4EEC62D4-A96C-41D8-B31A-4F9640C07160}" type="datetimeFigureOut">
               <a:rPr lang="zh-CN" altLang="en-US" smtClean="0"/>
-              <a:t>2023/12/11</a:t>
+              <a:t>2023/12/12</a:t>
             </a:fld>
             <a:endParaRPr lang="zh-CN" altLang="en-US"/>
           </a:p>
@@ -2116,7 +2116,7 @@
           <a:p>
             <a:fld id="{4EEC62D4-A96C-41D8-B31A-4F9640C07160}" type="datetimeFigureOut">
               <a:rPr lang="zh-CN" altLang="en-US" smtClean="0"/>
-              <a:t>2023/12/11</a:t>
+              <a:t>2023/12/12</a:t>
             </a:fld>
             <a:endParaRPr lang="zh-CN" altLang="en-US"/>
           </a:p>
@@ -2483,7 +2483,7 @@
           <a:p>
             <a:fld id="{4EEC62D4-A96C-41D8-B31A-4F9640C07160}" type="datetimeFigureOut">
               <a:rPr lang="zh-CN" altLang="en-US" smtClean="0"/>
-              <a:t>2023/12/11</a:t>
+              <a:t>2023/12/12</a:t>
             </a:fld>
             <a:endParaRPr lang="zh-CN" altLang="en-US"/>
           </a:p>
@@ -2601,7 +2601,7 @@
           <a:p>
             <a:fld id="{4EEC62D4-A96C-41D8-B31A-4F9640C07160}" type="datetimeFigureOut">
               <a:rPr lang="zh-CN" altLang="en-US" smtClean="0"/>
-              <a:t>2023/12/11</a:t>
+              <a:t>2023/12/12</a:t>
             </a:fld>
             <a:endParaRPr lang="zh-CN" altLang="en-US"/>
           </a:p>
@@ -2696,7 +2696,7 @@
           <a:p>
             <a:fld id="{4EEC62D4-A96C-41D8-B31A-4F9640C07160}" type="datetimeFigureOut">
               <a:rPr lang="zh-CN" altLang="en-US" smtClean="0"/>
-              <a:t>2023/12/11</a:t>
+              <a:t>2023/12/12</a:t>
             </a:fld>
             <a:endParaRPr lang="zh-CN" altLang="en-US"/>
           </a:p>
@@ -2973,7 +2973,7 @@
           <a:p>
             <a:fld id="{4EEC62D4-A96C-41D8-B31A-4F9640C07160}" type="datetimeFigureOut">
               <a:rPr lang="zh-CN" altLang="en-US" smtClean="0"/>
-              <a:t>2023/12/11</a:t>
+              <a:t>2023/12/12</a:t>
             </a:fld>
             <a:endParaRPr lang="zh-CN" altLang="en-US"/>
           </a:p>
@@ -3226,7 +3226,7 @@
           <a:p>
             <a:fld id="{4EEC62D4-A96C-41D8-B31A-4F9640C07160}" type="datetimeFigureOut">
               <a:rPr lang="zh-CN" altLang="en-US" smtClean="0"/>
-              <a:t>2023/12/11</a:t>
+              <a:t>2023/12/12</a:t>
             </a:fld>
             <a:endParaRPr lang="zh-CN" altLang="en-US"/>
           </a:p>
@@ -3439,7 +3439,7 @@
           <a:p>
             <a:fld id="{4EEC62D4-A96C-41D8-B31A-4F9640C07160}" type="datetimeFigureOut">
               <a:rPr lang="zh-CN" altLang="en-US" smtClean="0"/>
-              <a:t>2023/12/11</a:t>
+              <a:t>2023/12/12</a:t>
             </a:fld>
             <a:endParaRPr lang="zh-CN" altLang="en-US"/>
           </a:p>
@@ -7241,7 +7241,7 @@
           <a:p>
             <a:pPr algn="ctr"/>
             <a:r>
-              <a:rPr lang="en-US" altLang="zh-CN" dirty="0">
+              <a:rPr lang="en-US" altLang="zh-CN" dirty="0" smtClean="0">
                 <a:solidFill>
                   <a:schemeClr val="tx1"/>
                 </a:solidFill>
@@ -12352,7 +12352,7 @@
           <a:graphicData uri="http://schemas.openxmlformats.org/presentationml/2006/ole">
             <mc:AlternateContent xmlns:mc="http://schemas.openxmlformats.org/markup-compatibility/2006">
               <mc:Choice xmlns:v="urn:schemas-microsoft-com:vml" Requires="v">
-                <p:oleObj spid="_x0000_s1071" name="AxMath" r:id="rId3" imgW="315000" imgH="228600" progId="Equation.AxMath">
+                <p:oleObj spid="_x0000_s1077" name="AxMath" r:id="rId3" imgW="315000" imgH="228600" progId="Equation.AxMath">
                   <p:embed/>
                 </p:oleObj>
               </mc:Choice>
@@ -12409,7 +12409,7 @@
           <a:graphicData uri="http://schemas.openxmlformats.org/presentationml/2006/ole">
             <mc:AlternateContent xmlns:mc="http://schemas.openxmlformats.org/markup-compatibility/2006">
               <mc:Choice xmlns:v="urn:schemas-microsoft-com:vml" Requires="v">
-                <p:oleObj spid="_x0000_s1072" name="AxMath" r:id="rId5" imgW="347760" imgH="228600" progId="Equation.AxMath">
+                <p:oleObj spid="_x0000_s1078" name="AxMath" r:id="rId5" imgW="347760" imgH="228600" progId="Equation.AxMath">
                   <p:embed/>
                 </p:oleObj>
               </mc:Choice>
@@ -12466,7 +12466,7 @@
           <a:graphicData uri="http://schemas.openxmlformats.org/presentationml/2006/ole">
             <mc:AlternateContent xmlns:mc="http://schemas.openxmlformats.org/markup-compatibility/2006">
               <mc:Choice xmlns:v="urn:schemas-microsoft-com:vml" Requires="v">
-                <p:oleObj spid="_x0000_s1073" name="AxMath" r:id="rId7" imgW="378000" imgH="228600" progId="Equation.AxMath">
+                <p:oleObj spid="_x0000_s1079" name="AxMath" r:id="rId7" imgW="378000" imgH="228600" progId="Equation.AxMath">
                   <p:embed/>
                 </p:oleObj>
               </mc:Choice>
@@ -13608,7 +13608,7 @@
           <a:graphicData uri="http://schemas.openxmlformats.org/presentationml/2006/ole">
             <mc:AlternateContent xmlns:mc="http://schemas.openxmlformats.org/markup-compatibility/2006">
               <mc:Choice xmlns:v="urn:schemas-microsoft-com:vml" Requires="v">
-                <p:oleObj spid="_x0000_s2311" name="AxMath" r:id="rId3" imgW="297360" imgH="151920" progId="Equation.AxMath">
+                <p:oleObj spid="_x0000_s2353" name="AxMath" r:id="rId3" imgW="297360" imgH="151920" progId="Equation.AxMath">
                   <p:embed/>
                 </p:oleObj>
               </mc:Choice>
@@ -14489,7 +14489,7 @@
           <a:graphicData uri="http://schemas.openxmlformats.org/presentationml/2006/ole">
             <mc:AlternateContent xmlns:mc="http://schemas.openxmlformats.org/markup-compatibility/2006">
               <mc:Choice xmlns:v="urn:schemas-microsoft-com:vml" Requires="v">
-                <p:oleObj spid="_x0000_s2312" name="AxMath" r:id="rId5" imgW="270360" imgH="151920" progId="Equation.AxMath">
+                <p:oleObj spid="_x0000_s2354" name="AxMath" r:id="rId5" imgW="270360" imgH="151920" progId="Equation.AxMath">
                   <p:embed/>
                 </p:oleObj>
               </mc:Choice>
@@ -14558,7 +14558,7 @@
           <a:graphicData uri="http://schemas.openxmlformats.org/presentationml/2006/ole">
             <mc:AlternateContent xmlns:mc="http://schemas.openxmlformats.org/markup-compatibility/2006">
               <mc:Choice xmlns:v="urn:schemas-microsoft-com:vml" Requires="v">
-                <p:oleObj spid="_x0000_s2313" name="AxMath" r:id="rId7" imgW="118080" imgH="151920" progId="Equation.AxMath">
+                <p:oleObj spid="_x0000_s2355" name="AxMath" r:id="rId7" imgW="118080" imgH="151920" progId="Equation.AxMath">
                   <p:embed/>
                 </p:oleObj>
               </mc:Choice>
@@ -14627,7 +14627,7 @@
           <a:graphicData uri="http://schemas.openxmlformats.org/presentationml/2006/ole">
             <mc:AlternateContent xmlns:mc="http://schemas.openxmlformats.org/markup-compatibility/2006">
               <mc:Choice xmlns:v="urn:schemas-microsoft-com:vml" Requires="v">
-                <p:oleObj spid="_x0000_s2314" name="AxMath" r:id="rId9" imgW="306360" imgH="151920" progId="Equation.AxMath">
+                <p:oleObj spid="_x0000_s2356" name="AxMath" r:id="rId9" imgW="306360" imgH="151920" progId="Equation.AxMath">
                   <p:embed/>
                 </p:oleObj>
               </mc:Choice>
@@ -14696,7 +14696,7 @@
           <a:graphicData uri="http://schemas.openxmlformats.org/presentationml/2006/ole">
             <mc:AlternateContent xmlns:mc="http://schemas.openxmlformats.org/markup-compatibility/2006">
               <mc:Choice xmlns:v="urn:schemas-microsoft-com:vml" Requires="v">
-                <p:oleObj spid="_x0000_s2315" name="AxMath" r:id="rId11" imgW="123120" imgH="151920" progId="Equation.AxMath">
+                <p:oleObj spid="_x0000_s2357" name="AxMath" r:id="rId11" imgW="123120" imgH="151920" progId="Equation.AxMath">
                   <p:embed/>
                 </p:oleObj>
               </mc:Choice>
@@ -14765,7 +14765,7 @@
           <a:graphicData uri="http://schemas.openxmlformats.org/presentationml/2006/ole">
             <mc:AlternateContent xmlns:mc="http://schemas.openxmlformats.org/markup-compatibility/2006">
               <mc:Choice xmlns:v="urn:schemas-microsoft-com:vml" Requires="v">
-                <p:oleObj spid="_x0000_s2316" name="AxMath" r:id="rId13" imgW="123840" imgH="151920" progId="Equation.AxMath">
+                <p:oleObj spid="_x0000_s2358" name="AxMath" r:id="rId13" imgW="123840" imgH="151920" progId="Equation.AxMath">
                   <p:embed/>
                 </p:oleObj>
               </mc:Choice>
@@ -14834,7 +14834,7 @@
           <a:graphicData uri="http://schemas.openxmlformats.org/presentationml/2006/ole">
             <mc:AlternateContent xmlns:mc="http://schemas.openxmlformats.org/markup-compatibility/2006">
               <mc:Choice xmlns:v="urn:schemas-microsoft-com:vml" Requires="v">
-                <p:oleObj spid="_x0000_s2317" name="AxMath" r:id="rId15" imgW="210240" imgH="151920" progId="Equation.AxMath">
+                <p:oleObj spid="_x0000_s2359" name="AxMath" r:id="rId15" imgW="210240" imgH="151920" progId="Equation.AxMath">
                   <p:embed/>
                 </p:oleObj>
               </mc:Choice>
@@ -14903,7 +14903,7 @@
           <a:graphicData uri="http://schemas.openxmlformats.org/presentationml/2006/ole">
             <mc:AlternateContent xmlns:mc="http://schemas.openxmlformats.org/markup-compatibility/2006">
               <mc:Choice xmlns:v="urn:schemas-microsoft-com:vml" Requires="v">
-                <p:oleObj spid="_x0000_s2318" name="AxMath" r:id="rId17" imgW="205560" imgH="151920" progId="Equation.AxMath">
+                <p:oleObj spid="_x0000_s2360" name="AxMath" r:id="rId17" imgW="205560" imgH="151920" progId="Equation.AxMath">
                   <p:embed/>
                 </p:oleObj>
               </mc:Choice>
@@ -14972,7 +14972,7 @@
           <a:graphicData uri="http://schemas.openxmlformats.org/presentationml/2006/ole">
             <mc:AlternateContent xmlns:mc="http://schemas.openxmlformats.org/markup-compatibility/2006">
               <mc:Choice xmlns:v="urn:schemas-microsoft-com:vml" Requires="v">
-                <p:oleObj spid="_x0000_s2319" name="AxMath" r:id="rId19" imgW="109440" imgH="151920" progId="Equation.AxMath">
+                <p:oleObj spid="_x0000_s2361" name="AxMath" r:id="rId19" imgW="109440" imgH="151920" progId="Equation.AxMath">
                   <p:embed/>
                 </p:oleObj>
               </mc:Choice>
@@ -15481,7 +15481,7 @@
           <a:graphicData uri="http://schemas.openxmlformats.org/presentationml/2006/ole">
             <mc:AlternateContent xmlns:mc="http://schemas.openxmlformats.org/markup-compatibility/2006">
               <mc:Choice xmlns:v="urn:schemas-microsoft-com:vml" Requires="v">
-                <p:oleObj spid="_x0000_s2320" name="AxMath" r:id="rId21" imgW="118080" imgH="151920" progId="Equation.AxMath">
+                <p:oleObj spid="_x0000_s2362" name="AxMath" r:id="rId21" imgW="118080" imgH="151920" progId="Equation.AxMath">
                   <p:embed/>
                 </p:oleObj>
               </mc:Choice>
@@ -15550,7 +15550,7 @@
           <a:graphicData uri="http://schemas.openxmlformats.org/presentationml/2006/ole">
             <mc:AlternateContent xmlns:mc="http://schemas.openxmlformats.org/markup-compatibility/2006">
               <mc:Choice xmlns:v="urn:schemas-microsoft-com:vml" Requires="v">
-                <p:oleObj spid="_x0000_s2321" name="AxMath" r:id="rId22" imgW="123120" imgH="151920" progId="Equation.AxMath">
+                <p:oleObj spid="_x0000_s2363" name="AxMath" r:id="rId22" imgW="123120" imgH="151920" progId="Equation.AxMath">
                   <p:embed/>
                 </p:oleObj>
               </mc:Choice>
@@ -15619,7 +15619,7 @@
           <a:graphicData uri="http://schemas.openxmlformats.org/presentationml/2006/ole">
             <mc:AlternateContent xmlns:mc="http://schemas.openxmlformats.org/markup-compatibility/2006">
               <mc:Choice xmlns:v="urn:schemas-microsoft-com:vml" Requires="v">
-                <p:oleObj spid="_x0000_s2322" name="AxMath" r:id="rId23" imgW="123840" imgH="151920" progId="Equation.AxMath">
+                <p:oleObj spid="_x0000_s2364" name="AxMath" r:id="rId23" imgW="123840" imgH="151920" progId="Equation.AxMath">
                   <p:embed/>
                 </p:oleObj>
               </mc:Choice>
@@ -15688,7 +15688,7 @@
           <a:graphicData uri="http://schemas.openxmlformats.org/presentationml/2006/ole">
             <mc:AlternateContent xmlns:mc="http://schemas.openxmlformats.org/markup-compatibility/2006">
               <mc:Choice xmlns:v="urn:schemas-microsoft-com:vml" Requires="v">
-                <p:oleObj spid="_x0000_s2323" name="AxMath" r:id="rId24" imgW="210240" imgH="151920" progId="Equation.AxMath">
+                <p:oleObj spid="_x0000_s2365" name="AxMath" r:id="rId24" imgW="210240" imgH="151920" progId="Equation.AxMath">
                   <p:embed/>
                 </p:oleObj>
               </mc:Choice>
@@ -15757,7 +15757,7 @@
           <a:graphicData uri="http://schemas.openxmlformats.org/presentationml/2006/ole">
             <mc:AlternateContent xmlns:mc="http://schemas.openxmlformats.org/markup-compatibility/2006">
               <mc:Choice xmlns:v="urn:schemas-microsoft-com:vml" Requires="v">
-                <p:oleObj spid="_x0000_s2324" name="AxMath" r:id="rId25" imgW="205560" imgH="151920" progId="Equation.AxMath">
+                <p:oleObj spid="_x0000_s2366" name="AxMath" r:id="rId25" imgW="205560" imgH="151920" progId="Equation.AxMath">
                   <p:embed/>
                 </p:oleObj>
               </mc:Choice>
@@ -15826,7 +15826,7 @@
           <a:graphicData uri="http://schemas.openxmlformats.org/presentationml/2006/ole">
             <mc:AlternateContent xmlns:mc="http://schemas.openxmlformats.org/markup-compatibility/2006">
               <mc:Choice xmlns:v="urn:schemas-microsoft-com:vml" Requires="v">
-                <p:oleObj spid="_x0000_s2325" name="AxMath" r:id="rId26" imgW="109440" imgH="151920" progId="Equation.AxMath">
+                <p:oleObj spid="_x0000_s2367" name="AxMath" r:id="rId26" imgW="109440" imgH="151920" progId="Equation.AxMath">
                   <p:embed/>
                 </p:oleObj>
               </mc:Choice>
@@ -15895,7 +15895,7 @@
           <a:graphicData uri="http://schemas.openxmlformats.org/presentationml/2006/ole">
             <mc:AlternateContent xmlns:mc="http://schemas.openxmlformats.org/markup-compatibility/2006">
               <mc:Choice xmlns:v="urn:schemas-microsoft-com:vml" Requires="v">
-                <p:oleObj spid="_x0000_s2326" name="AxMath" r:id="rId27" imgW="107640" imgH="151920" progId="Equation.AxMath">
+                <p:oleObj spid="_x0000_s2368" name="AxMath" r:id="rId27" imgW="107640" imgH="151920" progId="Equation.AxMath">
                   <p:embed/>
                 </p:oleObj>
               </mc:Choice>
@@ -15964,7 +15964,7 @@
           <a:graphicData uri="http://schemas.openxmlformats.org/presentationml/2006/ole">
             <mc:AlternateContent xmlns:mc="http://schemas.openxmlformats.org/markup-compatibility/2006">
               <mc:Choice xmlns:v="urn:schemas-microsoft-com:vml" Requires="v">
-                <p:oleObj spid="_x0000_s2327" name="AxMath" r:id="rId29" imgW="111960" imgH="151920" progId="Equation.AxMath">
+                <p:oleObj spid="_x0000_s2369" name="AxMath" r:id="rId29" imgW="111960" imgH="151920" progId="Equation.AxMath">
                   <p:embed/>
                 </p:oleObj>
               </mc:Choice>
@@ -16033,7 +16033,7 @@
           <a:graphicData uri="http://schemas.openxmlformats.org/presentationml/2006/ole">
             <mc:AlternateContent xmlns:mc="http://schemas.openxmlformats.org/markup-compatibility/2006">
               <mc:Choice xmlns:v="urn:schemas-microsoft-com:vml" Requires="v">
-                <p:oleObj spid="_x0000_s2328" name="AxMath" r:id="rId31" imgW="113040" imgH="151920" progId="Equation.AxMath">
+                <p:oleObj spid="_x0000_s2370" name="AxMath" r:id="rId31" imgW="113040" imgH="151920" progId="Equation.AxMath">
                   <p:embed/>
                 </p:oleObj>
               </mc:Choice>
@@ -16102,7 +16102,7 @@
           <a:graphicData uri="http://schemas.openxmlformats.org/presentationml/2006/ole">
             <mc:AlternateContent xmlns:mc="http://schemas.openxmlformats.org/markup-compatibility/2006">
               <mc:Choice xmlns:v="urn:schemas-microsoft-com:vml" Requires="v">
-                <p:oleObj spid="_x0000_s2329" name="AxMath" r:id="rId33" imgW="199440" imgH="151920" progId="Equation.AxMath">
+                <p:oleObj spid="_x0000_s2371" name="AxMath" r:id="rId33" imgW="199440" imgH="151920" progId="Equation.AxMath">
                   <p:embed/>
                 </p:oleObj>
               </mc:Choice>
@@ -16171,7 +16171,7 @@
           <a:graphicData uri="http://schemas.openxmlformats.org/presentationml/2006/ole">
             <mc:AlternateContent xmlns:mc="http://schemas.openxmlformats.org/markup-compatibility/2006">
               <mc:Choice xmlns:v="urn:schemas-microsoft-com:vml" Requires="v">
-                <p:oleObj spid="_x0000_s2330" name="AxMath" r:id="rId35" imgW="194760" imgH="151920" progId="Equation.AxMath">
+                <p:oleObj spid="_x0000_s2372" name="AxMath" r:id="rId35" imgW="194760" imgH="151920" progId="Equation.AxMath">
                   <p:embed/>
                 </p:oleObj>
               </mc:Choice>
@@ -16240,7 +16240,7 @@
           <a:graphicData uri="http://schemas.openxmlformats.org/presentationml/2006/ole">
             <mc:AlternateContent xmlns:mc="http://schemas.openxmlformats.org/markup-compatibility/2006">
               <mc:Choice xmlns:v="urn:schemas-microsoft-com:vml" Requires="v">
-                <p:oleObj spid="_x0000_s2331" name="AxMath" r:id="rId37" imgW="98280" imgH="151920" progId="Equation.AxMath">
+                <p:oleObj spid="_x0000_s2373" name="AxMath" r:id="rId37" imgW="98280" imgH="151920" progId="Equation.AxMath">
                   <p:embed/>
                 </p:oleObj>
               </mc:Choice>
@@ -23884,7 +23884,7 @@
           <a:graphicData uri="http://schemas.openxmlformats.org/presentationml/2006/ole">
             <mc:AlternateContent xmlns:mc="http://schemas.openxmlformats.org/markup-compatibility/2006">
               <mc:Choice xmlns:v="urn:schemas-microsoft-com:vml" Requires="v">
-                <p:oleObj spid="_x0000_s3263" name="AxMath" r:id="rId3" imgW="118080" imgH="151920" progId="Equation.AxMath">
+                <p:oleObj spid="_x0000_s3305" name="AxMath" r:id="rId3" imgW="118080" imgH="151920" progId="Equation.AxMath">
                   <p:embed/>
                 </p:oleObj>
               </mc:Choice>
@@ -23949,7 +23949,7 @@
           <a:graphicData uri="http://schemas.openxmlformats.org/presentationml/2006/ole">
             <mc:AlternateContent xmlns:mc="http://schemas.openxmlformats.org/markup-compatibility/2006">
               <mc:Choice xmlns:v="urn:schemas-microsoft-com:vml" Requires="v">
-                <p:oleObj spid="_x0000_s3264" name="AxMath" r:id="rId5" imgW="123120" imgH="151920" progId="Equation.AxMath">
+                <p:oleObj spid="_x0000_s3306" name="AxMath" r:id="rId5" imgW="123120" imgH="151920" progId="Equation.AxMath">
                   <p:embed/>
                 </p:oleObj>
               </mc:Choice>
@@ -24014,7 +24014,7 @@
           <a:graphicData uri="http://schemas.openxmlformats.org/presentationml/2006/ole">
             <mc:AlternateContent xmlns:mc="http://schemas.openxmlformats.org/markup-compatibility/2006">
               <mc:Choice xmlns:v="urn:schemas-microsoft-com:vml" Requires="v">
-                <p:oleObj spid="_x0000_s3265" name="AxMath" r:id="rId7" imgW="123840" imgH="151920" progId="Equation.AxMath">
+                <p:oleObj spid="_x0000_s3307" name="AxMath" r:id="rId7" imgW="123840" imgH="151920" progId="Equation.AxMath">
                   <p:embed/>
                 </p:oleObj>
               </mc:Choice>
@@ -24079,7 +24079,7 @@
           <a:graphicData uri="http://schemas.openxmlformats.org/presentationml/2006/ole">
             <mc:AlternateContent xmlns:mc="http://schemas.openxmlformats.org/markup-compatibility/2006">
               <mc:Choice xmlns:v="urn:schemas-microsoft-com:vml" Requires="v">
-                <p:oleObj spid="_x0000_s3266" name="AxMath" r:id="rId9" imgW="236160" imgH="151920" progId="Equation.AxMath">
+                <p:oleObj spid="_x0000_s3308" name="AxMath" r:id="rId9" imgW="236160" imgH="151920" progId="Equation.AxMath">
                   <p:embed/>
                 </p:oleObj>
               </mc:Choice>
@@ -24144,7 +24144,7 @@
           <a:graphicData uri="http://schemas.openxmlformats.org/presentationml/2006/ole">
             <mc:AlternateContent xmlns:mc="http://schemas.openxmlformats.org/markup-compatibility/2006">
               <mc:Choice xmlns:v="urn:schemas-microsoft-com:vml" Requires="v">
-                <p:oleObj spid="_x0000_s3267" name="AxMath" r:id="rId11" imgW="231840" imgH="151920" progId="Equation.AxMath">
+                <p:oleObj spid="_x0000_s3309" name="AxMath" r:id="rId11" imgW="231840" imgH="151920" progId="Equation.AxMath">
                   <p:embed/>
                 </p:oleObj>
               </mc:Choice>
@@ -24209,7 +24209,7 @@
           <a:graphicData uri="http://schemas.openxmlformats.org/presentationml/2006/ole">
             <mc:AlternateContent xmlns:mc="http://schemas.openxmlformats.org/markup-compatibility/2006">
               <mc:Choice xmlns:v="urn:schemas-microsoft-com:vml" Requires="v">
-                <p:oleObj spid="_x0000_s3268" name="AxMath" r:id="rId13" imgW="135360" imgH="151920" progId="Equation.AxMath">
+                <p:oleObj spid="_x0000_s3310" name="AxMath" r:id="rId13" imgW="135360" imgH="151920" progId="Equation.AxMath">
                   <p:embed/>
                 </p:oleObj>
               </mc:Choice>
@@ -24714,7 +24714,7 @@
           <a:graphicData uri="http://schemas.openxmlformats.org/presentationml/2006/ole">
             <mc:AlternateContent xmlns:mc="http://schemas.openxmlformats.org/markup-compatibility/2006">
               <mc:Choice xmlns:v="urn:schemas-microsoft-com:vml" Requires="v">
-                <p:oleObj spid="_x0000_s3269" name="AxMath" r:id="rId15" imgW="118080" imgH="151920" progId="Equation.AxMath">
+                <p:oleObj spid="_x0000_s3311" name="AxMath" r:id="rId15" imgW="118080" imgH="151920" progId="Equation.AxMath">
                   <p:embed/>
                 </p:oleObj>
               </mc:Choice>
@@ -24779,7 +24779,7 @@
           <a:graphicData uri="http://schemas.openxmlformats.org/presentationml/2006/ole">
             <mc:AlternateContent xmlns:mc="http://schemas.openxmlformats.org/markup-compatibility/2006">
               <mc:Choice xmlns:v="urn:schemas-microsoft-com:vml" Requires="v">
-                <p:oleObj spid="_x0000_s3270" name="AxMath" r:id="rId16" imgW="123120" imgH="151920" progId="Equation.AxMath">
+                <p:oleObj spid="_x0000_s3312" name="AxMath" r:id="rId16" imgW="123120" imgH="151920" progId="Equation.AxMath">
                   <p:embed/>
                 </p:oleObj>
               </mc:Choice>
@@ -24844,7 +24844,7 @@
           <a:graphicData uri="http://schemas.openxmlformats.org/presentationml/2006/ole">
             <mc:AlternateContent xmlns:mc="http://schemas.openxmlformats.org/markup-compatibility/2006">
               <mc:Choice xmlns:v="urn:schemas-microsoft-com:vml" Requires="v">
-                <p:oleObj spid="_x0000_s3271" name="AxMath" r:id="rId17" imgW="123840" imgH="151920" progId="Equation.AxMath">
+                <p:oleObj spid="_x0000_s3313" name="AxMath" r:id="rId17" imgW="123840" imgH="151920" progId="Equation.AxMath">
                   <p:embed/>
                 </p:oleObj>
               </mc:Choice>
@@ -24909,7 +24909,7 @@
           <a:graphicData uri="http://schemas.openxmlformats.org/presentationml/2006/ole">
             <mc:AlternateContent xmlns:mc="http://schemas.openxmlformats.org/markup-compatibility/2006">
               <mc:Choice xmlns:v="urn:schemas-microsoft-com:vml" Requires="v">
-                <p:oleObj spid="_x0000_s3272" name="AxMath" r:id="rId18" imgW="236160" imgH="151920" progId="Equation.AxMath">
+                <p:oleObj spid="_x0000_s3314" name="AxMath" r:id="rId18" imgW="236160" imgH="151920" progId="Equation.AxMath">
                   <p:embed/>
                 </p:oleObj>
               </mc:Choice>
@@ -24974,7 +24974,7 @@
           <a:graphicData uri="http://schemas.openxmlformats.org/presentationml/2006/ole">
             <mc:AlternateContent xmlns:mc="http://schemas.openxmlformats.org/markup-compatibility/2006">
               <mc:Choice xmlns:v="urn:schemas-microsoft-com:vml" Requires="v">
-                <p:oleObj spid="_x0000_s3273" name="AxMath" r:id="rId19" imgW="231840" imgH="151920" progId="Equation.AxMath">
+                <p:oleObj spid="_x0000_s3315" name="AxMath" r:id="rId19" imgW="231840" imgH="151920" progId="Equation.AxMath">
                   <p:embed/>
                 </p:oleObj>
               </mc:Choice>
@@ -25039,7 +25039,7 @@
           <a:graphicData uri="http://schemas.openxmlformats.org/presentationml/2006/ole">
             <mc:AlternateContent xmlns:mc="http://schemas.openxmlformats.org/markup-compatibility/2006">
               <mc:Choice xmlns:v="urn:schemas-microsoft-com:vml" Requires="v">
-                <p:oleObj spid="_x0000_s3274" name="AxMath" r:id="rId20" imgW="135360" imgH="151920" progId="Equation.AxMath">
+                <p:oleObj spid="_x0000_s3316" name="AxMath" r:id="rId20" imgW="135360" imgH="151920" progId="Equation.AxMath">
                   <p:embed/>
                 </p:oleObj>
               </mc:Choice>
@@ -25104,7 +25104,7 @@
           <a:graphicData uri="http://schemas.openxmlformats.org/presentationml/2006/ole">
             <mc:AlternateContent xmlns:mc="http://schemas.openxmlformats.org/markup-compatibility/2006">
               <mc:Choice xmlns:v="urn:schemas-microsoft-com:vml" Requires="v">
-                <p:oleObj spid="_x0000_s3275" name="AxMath" r:id="rId21" imgW="107640" imgH="151920" progId="Equation.AxMath">
+                <p:oleObj spid="_x0000_s3317" name="AxMath" r:id="rId21" imgW="107640" imgH="151920" progId="Equation.AxMath">
                   <p:embed/>
                 </p:oleObj>
               </mc:Choice>
@@ -25169,7 +25169,7 @@
           <a:graphicData uri="http://schemas.openxmlformats.org/presentationml/2006/ole">
             <mc:AlternateContent xmlns:mc="http://schemas.openxmlformats.org/markup-compatibility/2006">
               <mc:Choice xmlns:v="urn:schemas-microsoft-com:vml" Requires="v">
-                <p:oleObj spid="_x0000_s3276" name="AxMath" r:id="rId23" imgW="111960" imgH="151920" progId="Equation.AxMath">
+                <p:oleObj spid="_x0000_s3318" name="AxMath" r:id="rId23" imgW="111960" imgH="151920" progId="Equation.AxMath">
                   <p:embed/>
                 </p:oleObj>
               </mc:Choice>
@@ -25234,7 +25234,7 @@
           <a:graphicData uri="http://schemas.openxmlformats.org/presentationml/2006/ole">
             <mc:AlternateContent xmlns:mc="http://schemas.openxmlformats.org/markup-compatibility/2006">
               <mc:Choice xmlns:v="urn:schemas-microsoft-com:vml" Requires="v">
-                <p:oleObj spid="_x0000_s3277" name="AxMath" r:id="rId25" imgW="113040" imgH="151920" progId="Equation.AxMath">
+                <p:oleObj spid="_x0000_s3319" name="AxMath" r:id="rId25" imgW="113040" imgH="151920" progId="Equation.AxMath">
                   <p:embed/>
                 </p:oleObj>
               </mc:Choice>
@@ -25299,7 +25299,7 @@
           <a:graphicData uri="http://schemas.openxmlformats.org/presentationml/2006/ole">
             <mc:AlternateContent xmlns:mc="http://schemas.openxmlformats.org/markup-compatibility/2006">
               <mc:Choice xmlns:v="urn:schemas-microsoft-com:vml" Requires="v">
-                <p:oleObj spid="_x0000_s3278" name="AxMath" r:id="rId27" imgW="225720" imgH="151920" progId="Equation.AxMath">
+                <p:oleObj spid="_x0000_s3320" name="AxMath" r:id="rId27" imgW="225720" imgH="151920" progId="Equation.AxMath">
                   <p:embed/>
                 </p:oleObj>
               </mc:Choice>
@@ -25364,7 +25364,7 @@
           <a:graphicData uri="http://schemas.openxmlformats.org/presentationml/2006/ole">
             <mc:AlternateContent xmlns:mc="http://schemas.openxmlformats.org/markup-compatibility/2006">
               <mc:Choice xmlns:v="urn:schemas-microsoft-com:vml" Requires="v">
-                <p:oleObj spid="_x0000_s3279" name="AxMath" r:id="rId29" imgW="220680" imgH="151920" progId="Equation.AxMath">
+                <p:oleObj spid="_x0000_s3321" name="AxMath" r:id="rId29" imgW="220680" imgH="151920" progId="Equation.AxMath">
                   <p:embed/>
                 </p:oleObj>
               </mc:Choice>
@@ -25429,7 +25429,7 @@
           <a:graphicData uri="http://schemas.openxmlformats.org/presentationml/2006/ole">
             <mc:AlternateContent xmlns:mc="http://schemas.openxmlformats.org/markup-compatibility/2006">
               <mc:Choice xmlns:v="urn:schemas-microsoft-com:vml" Requires="v">
-                <p:oleObj spid="_x0000_s3280" name="AxMath" r:id="rId31" imgW="124920" imgH="151920" progId="Equation.AxMath">
+                <p:oleObj spid="_x0000_s3322" name="AxMath" r:id="rId31" imgW="124920" imgH="151920" progId="Equation.AxMath">
                   <p:embed/>
                 </p:oleObj>
               </mc:Choice>
@@ -25594,7 +25594,7 @@
           <a:graphicData uri="http://schemas.openxmlformats.org/presentationml/2006/ole">
             <mc:AlternateContent xmlns:mc="http://schemas.openxmlformats.org/markup-compatibility/2006">
               <mc:Choice xmlns:v="urn:schemas-microsoft-com:vml" Requires="v">
-                <p:oleObj spid="_x0000_s3281" name="AxMath" r:id="rId33" imgW="96840" imgH="226800" progId="Equation.AxMath">
+                <p:oleObj spid="_x0000_s3323" name="AxMath" r:id="rId33" imgW="96840" imgH="226800" progId="Equation.AxMath">
                   <p:embed/>
                 </p:oleObj>
               </mc:Choice>
@@ -25645,7 +25645,7 @@
           <a:graphicData uri="http://schemas.openxmlformats.org/presentationml/2006/ole">
             <mc:AlternateContent xmlns:mc="http://schemas.openxmlformats.org/markup-compatibility/2006">
               <mc:Choice xmlns:v="urn:schemas-microsoft-com:vml" Requires="v">
-                <p:oleObj spid="_x0000_s3282" name="AxMath" r:id="rId35" imgW="117360" imgH="226800" progId="Equation.AxMath">
+                <p:oleObj spid="_x0000_s3324" name="AxMath" r:id="rId35" imgW="117360" imgH="226800" progId="Equation.AxMath">
                   <p:embed/>
                 </p:oleObj>
               </mc:Choice>
@@ -25696,7 +25696,7 @@
           <a:graphicData uri="http://schemas.openxmlformats.org/presentationml/2006/ole">
             <mc:AlternateContent xmlns:mc="http://schemas.openxmlformats.org/markup-compatibility/2006">
               <mc:Choice xmlns:v="urn:schemas-microsoft-com:vml" Requires="v">
-                <p:oleObj spid="_x0000_s3283" name="AxMath" r:id="rId37" imgW="152280" imgH="226800" progId="Equation.AxMath">
+                <p:oleObj spid="_x0000_s3325" name="AxMath" r:id="rId37" imgW="152280" imgH="226800" progId="Equation.AxMath">
                   <p:embed/>
                 </p:oleObj>
               </mc:Choice>
